--- a/ai-agent-terms-conference-talk.pptx
+++ b/ai-agent-terms-conference-talk.pptx
@@ -2,25 +2,25 @@
 <file path=ppt/presentation.xml><?xml version="1.0" encoding="utf-8"?>
 <p:presentation xmlns:p="http://schemas.openxmlformats.org/presentationml/2006/main">
   <p:sldMasterIdLst>
-    <p:sldMasterId xmlns:r="http://schemas.openxmlformats.org/officeDocument/2006/relationships" id="2147483648" r:id="R13352d41616c4a75"/>
+    <p:sldMasterId xmlns:r="http://schemas.openxmlformats.org/officeDocument/2006/relationships" id="2147483648" r:id="Rfad0bdf6b0664dac"/>
   </p:sldMasterIdLst>
   <p:notesMasterIdLst>
-    <p:notesMasterId xmlns:r="http://schemas.openxmlformats.org/officeDocument/2006/relationships" r:id="R47ffd5bb48104fc8"/>
+    <p:notesMasterId xmlns:r="http://schemas.openxmlformats.org/officeDocument/2006/relationships" r:id="R62a02a58406944e2"/>
   </p:notesMasterIdLst>
   <p:sldIdLst>
-    <p:sldId xmlns:r="http://schemas.openxmlformats.org/officeDocument/2006/relationships" id="256" r:id="Rc5f9d8adeb474bfd"/>
-    <p:sldId xmlns:r="http://schemas.openxmlformats.org/officeDocument/2006/relationships" id="257" r:id="R39cbebe9ab9b47b5"/>
-    <p:sldId xmlns:r="http://schemas.openxmlformats.org/officeDocument/2006/relationships" id="258" r:id="R4846099cdff44201"/>
-    <p:sldId xmlns:r="http://schemas.openxmlformats.org/officeDocument/2006/relationships" id="259" r:id="R80031fa3bec84338"/>
-    <p:sldId xmlns:r="http://schemas.openxmlformats.org/officeDocument/2006/relationships" id="260" r:id="R206db2c308cd47bd"/>
-    <p:sldId xmlns:r="http://schemas.openxmlformats.org/officeDocument/2006/relationships" id="261" r:id="R8f734b74dc7741c8"/>
-    <p:sldId xmlns:r="http://schemas.openxmlformats.org/officeDocument/2006/relationships" id="262" r:id="R4c069ec0536d4029"/>
-    <p:sldId xmlns:r="http://schemas.openxmlformats.org/officeDocument/2006/relationships" id="263" r:id="Rce02d00959d74564"/>
-    <p:sldId xmlns:r="http://schemas.openxmlformats.org/officeDocument/2006/relationships" id="264" r:id="R5cbd63f2f1cc4300"/>
-    <p:sldId xmlns:r="http://schemas.openxmlformats.org/officeDocument/2006/relationships" id="265" r:id="R4cb854b2bbe640fc"/>
-    <p:sldId xmlns:r="http://schemas.openxmlformats.org/officeDocument/2006/relationships" id="266" r:id="Ra2f987ee60a94217"/>
-    <p:sldId xmlns:r="http://schemas.openxmlformats.org/officeDocument/2006/relationships" id="267" r:id="R5f31888b1f104a8e"/>
-    <p:sldId xmlns:r="http://schemas.openxmlformats.org/officeDocument/2006/relationships" id="268" r:id="R59e98b6bff174c26"/>
+    <p:sldId xmlns:r="http://schemas.openxmlformats.org/officeDocument/2006/relationships" id="256" r:id="R6f0b677dafcf42f4"/>
+    <p:sldId xmlns:r="http://schemas.openxmlformats.org/officeDocument/2006/relationships" id="257" r:id="R2e3ac7b2e2c54617"/>
+    <p:sldId xmlns:r="http://schemas.openxmlformats.org/officeDocument/2006/relationships" id="258" r:id="R8f456186ddd44289"/>
+    <p:sldId xmlns:r="http://schemas.openxmlformats.org/officeDocument/2006/relationships" id="259" r:id="R8281fc70aac74dff"/>
+    <p:sldId xmlns:r="http://schemas.openxmlformats.org/officeDocument/2006/relationships" id="260" r:id="R8e22c65fc27c460d"/>
+    <p:sldId xmlns:r="http://schemas.openxmlformats.org/officeDocument/2006/relationships" id="261" r:id="R498d78172b5f46e5"/>
+    <p:sldId xmlns:r="http://schemas.openxmlformats.org/officeDocument/2006/relationships" id="262" r:id="R6abe605a612643c8"/>
+    <p:sldId xmlns:r="http://schemas.openxmlformats.org/officeDocument/2006/relationships" id="263" r:id="R509272fbeb3f4f1c"/>
+    <p:sldId xmlns:r="http://schemas.openxmlformats.org/officeDocument/2006/relationships" id="264" r:id="Ree4d05c4ccb945ff"/>
+    <p:sldId xmlns:r="http://schemas.openxmlformats.org/officeDocument/2006/relationships" id="265" r:id="Rb72d2eb8ec084ac4"/>
+    <p:sldId xmlns:r="http://schemas.openxmlformats.org/officeDocument/2006/relationships" id="266" r:id="R47895bd608e946b5"/>
+    <p:sldId xmlns:r="http://schemas.openxmlformats.org/officeDocument/2006/relationships" id="267" r:id="R9faf88aa660440c5"/>
+    <p:sldId xmlns:r="http://schemas.openxmlformats.org/officeDocument/2006/relationships" id="268" r:id="R4d42609ca77545b1"/>
   </p:sldIdLst>
   <p:sldSz cx="12192000" cy="6858000"/>
   <p:notesSz cx="6858000" cy="9144000"/>
@@ -1582,7 +1582,7 @@
   </p:cSld>
   <p:clrMap bg1="lt1" tx1="dk1" bg2="lt2" tx2="dk2" accent1="accent1" accent2="accent2" accent3="accent3" accent4="accent4" accent5="accent5" accent6="accent6" hlink="hlink" folHlink="folHlink"/>
   <p:sldLayoutIdLst>
-    <p:sldLayoutId xmlns:r="http://schemas.openxmlformats.org/officeDocument/2006/relationships" id="2147483649" r:id="Rf3428e642cc846c2"/>
+    <p:sldLayoutId xmlns:r="http://schemas.openxmlformats.org/officeDocument/2006/relationships" id="2147483649" r:id="Re6f6e35e6b4c4beb"/>
   </p:sldLayoutIdLst>
   <p:txStyles>
     <p:titleStyle>
@@ -2161,6 +2161,7 @@
           <a:lstStyle xmlns:a="http://schemas.openxmlformats.org/drawingml/2006/main"/>
           <a:p xmlns:a="http://schemas.openxmlformats.org/drawingml/2006/main">
             <a:pPr algn="l">
+              <a:buNone/>
               <a:defRPr sz="5100" b="1">
                 <a:solidFill>
                   <a:srgbClr val="000000"/>
@@ -2242,6 +2243,7 @@
           <a:lstStyle xmlns:a="http://schemas.openxmlformats.org/drawingml/2006/main"/>
           <a:p xmlns:a="http://schemas.openxmlformats.org/drawingml/2006/main">
             <a:pPr algn="l">
+              <a:buNone/>
               <a:defRPr sz="1800" b="0">
                 <a:solidFill>
                   <a:srgbClr val="222222"/>
@@ -2323,6 +2325,7 @@
           <a:lstStyle xmlns:a="http://schemas.openxmlformats.org/drawingml/2006/main"/>
           <a:p xmlns:a="http://schemas.openxmlformats.org/drawingml/2006/main">
             <a:pPr algn="l">
+              <a:buNone/>
               <a:defRPr sz="2100" b="0">
                 <a:solidFill>
                   <a:srgbClr val="000000"/>
@@ -2373,6 +2376,7 @@
           <a:lstStyle xmlns:a="http://schemas.openxmlformats.org/drawingml/2006/main"/>
           <a:p xmlns:a="http://schemas.openxmlformats.org/drawingml/2006/main">
             <a:pPr algn="l">
+              <a:buNone/>
               <a:defRPr sz="2100" b="0">
                 <a:solidFill>
                   <a:srgbClr val="000000"/>
@@ -2423,6 +2427,7 @@
           <a:lstStyle xmlns:a="http://schemas.openxmlformats.org/drawingml/2006/main"/>
           <a:p xmlns:a="http://schemas.openxmlformats.org/drawingml/2006/main">
             <a:pPr algn="l">
+              <a:buNone/>
               <a:defRPr sz="2100" b="0">
                 <a:solidFill>
                   <a:srgbClr val="000000"/>
@@ -2535,6 +2540,7 @@
           <a:lstStyle xmlns:a="http://schemas.openxmlformats.org/drawingml/2006/main"/>
           <a:p xmlns:a="http://schemas.openxmlformats.org/drawingml/2006/main">
             <a:pPr algn="l">
+              <a:buNone/>
               <a:defRPr sz="1500" b="0">
                 <a:solidFill>
                   <a:srgbClr val="555555"/>
@@ -2585,6 +2591,7 @@
           <a:lstStyle xmlns:a="http://schemas.openxmlformats.org/drawingml/2006/main"/>
           <a:p xmlns:a="http://schemas.openxmlformats.org/drawingml/2006/main">
             <a:pPr algn="l">
+              <a:buNone/>
               <a:defRPr sz="1500" b="0">
                 <a:solidFill>
                   <a:srgbClr val="555555"/>
@@ -2635,6 +2642,7 @@
           <a:lstStyle xmlns:a="http://schemas.openxmlformats.org/drawingml/2006/main"/>
           <a:p xmlns:a="http://schemas.openxmlformats.org/drawingml/2006/main">
             <a:pPr algn="l">
+              <a:buNone/>
               <a:defRPr sz="1500" b="0">
                 <a:solidFill>
                   <a:srgbClr val="555555"/>
@@ -2685,6 +2693,7 @@
           <a:lstStyle xmlns:a="http://schemas.openxmlformats.org/drawingml/2006/main"/>
           <a:p xmlns:a="http://schemas.openxmlformats.org/drawingml/2006/main">
             <a:pPr algn="l">
+              <a:buNone/>
               <a:defRPr sz="1125" b="0">
                 <a:solidFill>
                   <a:srgbClr val="555555"/>
@@ -2735,6 +2744,7 @@
           <a:lstStyle xmlns:a="http://schemas.openxmlformats.org/drawingml/2006/main"/>
           <a:p xmlns:a="http://schemas.openxmlformats.org/drawingml/2006/main">
             <a:pPr algn="r">
+              <a:buNone/>
               <a:defRPr sz="1125" b="0">
                 <a:solidFill>
                   <a:srgbClr val="000000"/>
@@ -2814,6 +2824,7 @@
           <a:lstStyle xmlns:a="http://schemas.openxmlformats.org/drawingml/2006/main"/>
           <a:p xmlns:a="http://schemas.openxmlformats.org/drawingml/2006/main">
             <a:pPr algn="l">
+              <a:buNone/>
               <a:defRPr sz="2925" b="0">
                 <a:solidFill>
                   <a:srgbClr val="000000"/>
@@ -2864,6 +2875,7 @@
           <a:lstStyle xmlns:a="http://schemas.openxmlformats.org/drawingml/2006/main"/>
           <a:p xmlns:a="http://schemas.openxmlformats.org/drawingml/2006/main">
             <a:pPr algn="l">
+              <a:buNone/>
               <a:defRPr sz="1650" b="0">
                 <a:solidFill>
                   <a:srgbClr val="555555"/>
@@ -2914,6 +2926,7 @@
           <a:lstStyle xmlns:a="http://schemas.openxmlformats.org/drawingml/2006/main"/>
           <a:p xmlns:a="http://schemas.openxmlformats.org/drawingml/2006/main">
             <a:pPr algn="l">
+              <a:buNone/>
               <a:defRPr sz="1125" b="0">
                 <a:solidFill>
                   <a:srgbClr val="555555"/>
@@ -2964,6 +2977,7 @@
           <a:lstStyle xmlns:a="http://schemas.openxmlformats.org/drawingml/2006/main"/>
           <a:p xmlns:a="http://schemas.openxmlformats.org/drawingml/2006/main">
             <a:pPr algn="r">
+              <a:buNone/>
               <a:defRPr sz="1125" b="0">
                 <a:solidFill>
                   <a:srgbClr val="000000"/>
@@ -3045,6 +3059,7 @@
           <a:lstStyle xmlns:a="http://schemas.openxmlformats.org/drawingml/2006/main"/>
           <a:p xmlns:a="http://schemas.openxmlformats.org/drawingml/2006/main">
             <a:pPr algn="l">
+              <a:buNone/>
               <a:defRPr sz="1200" b="1">
                 <a:solidFill>
                   <a:srgbClr val="FFFFFF"/>
@@ -3095,6 +3110,7 @@
           <a:lstStyle xmlns:a="http://schemas.openxmlformats.org/drawingml/2006/main"/>
           <a:p xmlns:a="http://schemas.openxmlformats.org/drawingml/2006/main">
             <a:pPr algn="l">
+              <a:buNone/>
               <a:defRPr sz="1350" b="0">
                 <a:solidFill>
                   <a:srgbClr val="FFFFFF"/>
@@ -3117,6 +3133,7 @@
           </a:p>
           <a:p xmlns:a="http://schemas.openxmlformats.org/drawingml/2006/main">
             <a:pPr algn="l">
+              <a:buNone/>
               <a:defRPr sz="1350" b="0">
                 <a:solidFill>
                   <a:srgbClr val="FFFFFF"/>
@@ -3134,6 +3151,7 @@
           </a:p>
           <a:p xmlns:a="http://schemas.openxmlformats.org/drawingml/2006/main">
             <a:pPr algn="l">
+              <a:buNone/>
               <a:defRPr sz="1350" b="0">
                 <a:solidFill>
                   <a:srgbClr val="FFFFFF"/>
@@ -3156,6 +3174,7 @@
           </a:p>
           <a:p xmlns:a="http://schemas.openxmlformats.org/drawingml/2006/main">
             <a:pPr algn="l">
+              <a:buNone/>
               <a:defRPr sz="1350" b="0">
                 <a:solidFill>
                   <a:srgbClr val="FFFFFF"/>
@@ -3173,6 +3192,7 @@
           </a:p>
           <a:p xmlns:a="http://schemas.openxmlformats.org/drawingml/2006/main">
             <a:pPr algn="l">
+              <a:buNone/>
               <a:defRPr sz="1350" b="0">
                 <a:solidFill>
                   <a:srgbClr val="FFFFFF"/>
@@ -3190,6 +3210,7 @@
           </a:p>
           <a:p xmlns:a="http://schemas.openxmlformats.org/drawingml/2006/main">
             <a:pPr algn="l">
+              <a:buNone/>
               <a:defRPr sz="1350" b="0">
                 <a:solidFill>
                   <a:srgbClr val="FFFFFF"/>
@@ -3207,6 +3228,7 @@
           </a:p>
           <a:p xmlns:a="http://schemas.openxmlformats.org/drawingml/2006/main">
             <a:pPr algn="l">
+              <a:buNone/>
               <a:defRPr sz="1350" b="0">
                 <a:solidFill>
                   <a:srgbClr val="FFFFFF"/>
@@ -3288,6 +3310,7 @@
           <a:lstStyle xmlns:a="http://schemas.openxmlformats.org/drawingml/2006/main"/>
           <a:p xmlns:a="http://schemas.openxmlformats.org/drawingml/2006/main">
             <a:pPr algn="l">
+              <a:buNone/>
               <a:defRPr sz="2100" b="0">
                 <a:solidFill>
                   <a:srgbClr val="000000"/>
@@ -3338,6 +3361,7 @@
           <a:lstStyle xmlns:a="http://schemas.openxmlformats.org/drawingml/2006/main"/>
           <a:p xmlns:a="http://schemas.openxmlformats.org/drawingml/2006/main">
             <a:pPr algn="l">
+              <a:buNone/>
               <a:defRPr sz="1725" b="0">
                 <a:solidFill>
                   <a:srgbClr val="222222"/>
@@ -3421,6 +3445,7 @@
           <a:lstStyle xmlns:a="http://schemas.openxmlformats.org/drawingml/2006/main"/>
           <a:p xmlns:a="http://schemas.openxmlformats.org/drawingml/2006/main">
             <a:pPr algn="l">
+              <a:buNone/>
               <a:defRPr sz="1350" b="0">
                 <a:solidFill>
                   <a:srgbClr val="000000"/>
@@ -3471,6 +3496,7 @@
           <a:lstStyle xmlns:a="http://schemas.openxmlformats.org/drawingml/2006/main"/>
           <a:p xmlns:a="http://schemas.openxmlformats.org/drawingml/2006/main">
             <a:pPr algn="l">
+              <a:buNone/>
               <a:defRPr sz="1125" b="0">
                 <a:solidFill>
                   <a:srgbClr val="555555"/>
@@ -3521,6 +3547,7 @@
           <a:lstStyle xmlns:a="http://schemas.openxmlformats.org/drawingml/2006/main"/>
           <a:p xmlns:a="http://schemas.openxmlformats.org/drawingml/2006/main">
             <a:pPr algn="r">
+              <a:buNone/>
               <a:defRPr sz="1125" b="0">
                 <a:solidFill>
                   <a:srgbClr val="000000"/>
@@ -3600,6 +3627,7 @@
           <a:lstStyle xmlns:a="http://schemas.openxmlformats.org/drawingml/2006/main"/>
           <a:p xmlns:a="http://schemas.openxmlformats.org/drawingml/2006/main">
             <a:pPr algn="l">
+              <a:buNone/>
               <a:defRPr sz="2925" b="0">
                 <a:solidFill>
                   <a:srgbClr val="000000"/>
@@ -3650,6 +3678,7 @@
           <a:lstStyle xmlns:a="http://schemas.openxmlformats.org/drawingml/2006/main"/>
           <a:p xmlns:a="http://schemas.openxmlformats.org/drawingml/2006/main">
             <a:pPr algn="l">
+              <a:buNone/>
               <a:defRPr sz="1650" b="0">
                 <a:solidFill>
                   <a:srgbClr val="555555"/>
@@ -3700,6 +3729,7 @@
           <a:lstStyle xmlns:a="http://schemas.openxmlformats.org/drawingml/2006/main"/>
           <a:p xmlns:a="http://schemas.openxmlformats.org/drawingml/2006/main">
             <a:pPr algn="l">
+              <a:buNone/>
               <a:defRPr sz="1125" b="0">
                 <a:solidFill>
                   <a:srgbClr val="555555"/>
@@ -3750,6 +3780,7 @@
           <a:lstStyle xmlns:a="http://schemas.openxmlformats.org/drawingml/2006/main"/>
           <a:p xmlns:a="http://schemas.openxmlformats.org/drawingml/2006/main">
             <a:pPr algn="r">
+              <a:buNone/>
               <a:defRPr sz="1125" b="0">
                 <a:solidFill>
                   <a:srgbClr val="000000"/>
@@ -3800,6 +3831,7 @@
           <a:lstStyle xmlns:a="http://schemas.openxmlformats.org/drawingml/2006/main"/>
           <a:p xmlns:a="http://schemas.openxmlformats.org/drawingml/2006/main">
             <a:pPr algn="l">
+              <a:buNone/>
               <a:defRPr sz="4200" b="1">
                 <a:solidFill>
                   <a:srgbClr val="FF6B35"/>
@@ -3850,6 +3882,7 @@
           <a:lstStyle xmlns:a="http://schemas.openxmlformats.org/drawingml/2006/main"/>
           <a:p xmlns:a="http://schemas.openxmlformats.org/drawingml/2006/main">
             <a:pPr algn="l">
+              <a:buNone/>
               <a:defRPr sz="2550" b="0">
                 <a:solidFill>
                   <a:srgbClr val="000000"/>
@@ -3931,6 +3964,7 @@
           <a:lstStyle xmlns:a="http://schemas.openxmlformats.org/drawingml/2006/main"/>
           <a:p xmlns:a="http://schemas.openxmlformats.org/drawingml/2006/main">
             <a:pPr algn="ctr">
+              <a:buNone/>
               <a:defRPr sz="2100" b="0">
                 <a:solidFill>
                   <a:srgbClr val="FFFFFF"/>
@@ -4107,6 +4141,7 @@
           <a:lstStyle xmlns:a="http://schemas.openxmlformats.org/drawingml/2006/main"/>
           <a:p xmlns:a="http://schemas.openxmlformats.org/drawingml/2006/main">
             <a:pPr algn="ctr">
+              <a:buNone/>
               <a:defRPr sz="1650" b="0">
                 <a:solidFill>
                   <a:srgbClr val="000000"/>
@@ -4221,6 +4256,7 @@
           <a:lstStyle xmlns:a="http://schemas.openxmlformats.org/drawingml/2006/main"/>
           <a:p xmlns:a="http://schemas.openxmlformats.org/drawingml/2006/main">
             <a:pPr algn="ctr">
+              <a:buNone/>
               <a:defRPr sz="1650" b="0">
                 <a:solidFill>
                   <a:srgbClr val="000000"/>
@@ -4335,6 +4371,7 @@
           <a:lstStyle xmlns:a="http://schemas.openxmlformats.org/drawingml/2006/main"/>
           <a:p xmlns:a="http://schemas.openxmlformats.org/drawingml/2006/main">
             <a:pPr algn="ctr">
+              <a:buNone/>
               <a:defRPr sz="1650" b="0">
                 <a:solidFill>
                   <a:srgbClr val="000000"/>
@@ -4449,6 +4486,7 @@
           <a:lstStyle xmlns:a="http://schemas.openxmlformats.org/drawingml/2006/main"/>
           <a:p xmlns:a="http://schemas.openxmlformats.org/drawingml/2006/main">
             <a:pPr algn="ctr">
+              <a:buNone/>
               <a:defRPr sz="1650" b="0">
                 <a:solidFill>
                   <a:srgbClr val="000000"/>
@@ -4499,6 +4537,7 @@
           <a:lstStyle xmlns:a="http://schemas.openxmlformats.org/drawingml/2006/main"/>
           <a:p xmlns:a="http://schemas.openxmlformats.org/drawingml/2006/main">
             <a:pPr algn="l">
+              <a:buNone/>
               <a:defRPr sz="1800" b="0">
                 <a:solidFill>
                   <a:srgbClr val="000000"/>
@@ -4549,6 +4588,7 @@
           <a:lstStyle xmlns:a="http://schemas.openxmlformats.org/drawingml/2006/main"/>
           <a:p xmlns:a="http://schemas.openxmlformats.org/drawingml/2006/main">
             <a:pPr algn="l">
+              <a:buNone/>
               <a:defRPr sz="1125" b="0">
                 <a:solidFill>
                   <a:srgbClr val="555555"/>
@@ -4599,6 +4639,7 @@
           <a:lstStyle xmlns:a="http://schemas.openxmlformats.org/drawingml/2006/main"/>
           <a:p xmlns:a="http://schemas.openxmlformats.org/drawingml/2006/main">
             <a:pPr algn="r">
+              <a:buNone/>
               <a:defRPr sz="1125" b="0">
                 <a:solidFill>
                   <a:srgbClr val="000000"/>
@@ -4678,6 +4719,7 @@
           <a:lstStyle xmlns:a="http://schemas.openxmlformats.org/drawingml/2006/main"/>
           <a:p xmlns:a="http://schemas.openxmlformats.org/drawingml/2006/main">
             <a:pPr algn="l">
+              <a:buNone/>
               <a:defRPr sz="2925" b="0">
                 <a:solidFill>
                   <a:srgbClr val="000000"/>
@@ -4728,6 +4770,7 @@
           <a:lstStyle xmlns:a="http://schemas.openxmlformats.org/drawingml/2006/main"/>
           <a:p xmlns:a="http://schemas.openxmlformats.org/drawingml/2006/main">
             <a:pPr algn="l">
+              <a:buNone/>
               <a:defRPr sz="1650" b="0">
                 <a:solidFill>
                   <a:srgbClr val="555555"/>
@@ -4778,6 +4821,7 @@
           <a:lstStyle xmlns:a="http://schemas.openxmlformats.org/drawingml/2006/main"/>
           <a:p xmlns:a="http://schemas.openxmlformats.org/drawingml/2006/main">
             <a:pPr algn="l">
+              <a:buNone/>
               <a:defRPr sz="1125" b="0">
                 <a:solidFill>
                   <a:srgbClr val="555555"/>
@@ -4828,6 +4872,7 @@
           <a:lstStyle xmlns:a="http://schemas.openxmlformats.org/drawingml/2006/main"/>
           <a:p xmlns:a="http://schemas.openxmlformats.org/drawingml/2006/main">
             <a:pPr algn="r">
+              <a:buNone/>
               <a:defRPr sz="1125" b="0">
                 <a:solidFill>
                   <a:srgbClr val="000000"/>
@@ -4909,6 +4954,7 @@
           <a:lstStyle xmlns:a="http://schemas.openxmlformats.org/drawingml/2006/main"/>
           <a:p xmlns:a="http://schemas.openxmlformats.org/drawingml/2006/main">
             <a:pPr algn="l">
+              <a:buNone/>
               <a:defRPr sz="1200" b="1">
                 <a:solidFill>
                   <a:srgbClr val="FFFFFF"/>
@@ -4959,6 +5005,7 @@
           <a:lstStyle xmlns:a="http://schemas.openxmlformats.org/drawingml/2006/main"/>
           <a:p xmlns:a="http://schemas.openxmlformats.org/drawingml/2006/main">
             <a:pPr algn="l">
+              <a:buNone/>
               <a:defRPr sz="1350" b="0">
                 <a:solidFill>
                   <a:srgbClr val="FFFFFF"/>
@@ -4976,6 +5023,7 @@
           </a:p>
           <a:p xmlns:a="http://schemas.openxmlformats.org/drawingml/2006/main">
             <a:pPr algn="l">
+              <a:buNone/>
               <a:defRPr sz="1350" b="0">
                 <a:solidFill>
                   <a:srgbClr val="FFFFFF"/>
@@ -4993,6 +5041,7 @@
           </a:p>
           <a:p xmlns:a="http://schemas.openxmlformats.org/drawingml/2006/main">
             <a:pPr algn="l">
+              <a:buNone/>
               <a:defRPr sz="1350" b="0">
                 <a:solidFill>
                   <a:srgbClr val="FFFFFF"/>
@@ -5010,6 +5059,7 @@
           </a:p>
           <a:p xmlns:a="http://schemas.openxmlformats.org/drawingml/2006/main">
             <a:pPr algn="l">
+              <a:buNone/>
               <a:defRPr sz="1350" b="0">
                 <a:solidFill>
                   <a:srgbClr val="FFFFFF"/>
@@ -5027,6 +5077,7 @@
           </a:p>
           <a:p xmlns:a="http://schemas.openxmlformats.org/drawingml/2006/main">
             <a:pPr algn="l">
+              <a:buNone/>
               <a:defRPr sz="1350" b="0">
                 <a:solidFill>
                   <a:srgbClr val="FFFFFF"/>
@@ -5049,6 +5100,7 @@
           </a:p>
           <a:p xmlns:a="http://schemas.openxmlformats.org/drawingml/2006/main">
             <a:pPr algn="l">
+              <a:buNone/>
               <a:defRPr sz="1350" b="0">
                 <a:solidFill>
                   <a:srgbClr val="FFFFFF"/>
@@ -5066,6 +5118,7 @@
           </a:p>
           <a:p xmlns:a="http://schemas.openxmlformats.org/drawingml/2006/main">
             <a:pPr algn="l">
+              <a:buNone/>
               <a:defRPr sz="1350" b="0">
                 <a:solidFill>
                   <a:srgbClr val="FFFFFF"/>
@@ -5147,6 +5200,7 @@
           <a:lstStyle xmlns:a="http://schemas.openxmlformats.org/drawingml/2006/main"/>
           <a:p xmlns:a="http://schemas.openxmlformats.org/drawingml/2006/main">
             <a:pPr algn="l">
+              <a:buNone/>
               <a:defRPr sz="2100" b="0">
                 <a:solidFill>
                   <a:srgbClr val="000000"/>
@@ -5228,6 +5282,7 @@
           <a:lstStyle xmlns:a="http://schemas.openxmlformats.org/drawingml/2006/main"/>
           <a:p xmlns:a="http://schemas.openxmlformats.org/drawingml/2006/main">
             <a:pPr algn="l">
+              <a:buNone/>
               <a:defRPr sz="1650" b="0">
                 <a:solidFill>
                   <a:srgbClr val="222222"/>
@@ -5309,6 +5364,7 @@
           <a:lstStyle xmlns:a="http://schemas.openxmlformats.org/drawingml/2006/main"/>
           <a:p xmlns:a="http://schemas.openxmlformats.org/drawingml/2006/main">
             <a:pPr algn="l">
+              <a:buNone/>
               <a:defRPr sz="1650" b="0">
                 <a:solidFill>
                   <a:srgbClr val="222222"/>
@@ -5390,6 +5446,7 @@
           <a:lstStyle xmlns:a="http://schemas.openxmlformats.org/drawingml/2006/main"/>
           <a:p xmlns:a="http://schemas.openxmlformats.org/drawingml/2006/main">
             <a:pPr algn="l">
+              <a:buNone/>
               <a:defRPr sz="1650" b="0">
                 <a:solidFill>
                   <a:srgbClr val="222222"/>
@@ -5473,6 +5530,7 @@
           <a:lstStyle xmlns:a="http://schemas.openxmlformats.org/drawingml/2006/main"/>
           <a:p xmlns:a="http://schemas.openxmlformats.org/drawingml/2006/main">
             <a:pPr algn="l">
+              <a:buNone/>
               <a:defRPr sz="1350" b="0">
                 <a:solidFill>
                   <a:srgbClr val="000000"/>
@@ -5523,6 +5581,7 @@
           <a:lstStyle xmlns:a="http://schemas.openxmlformats.org/drawingml/2006/main"/>
           <a:p xmlns:a="http://schemas.openxmlformats.org/drawingml/2006/main">
             <a:pPr algn="l">
+              <a:buNone/>
               <a:defRPr sz="1125" b="0">
                 <a:solidFill>
                   <a:srgbClr val="555555"/>
@@ -5573,6 +5632,7 @@
           <a:lstStyle xmlns:a="http://schemas.openxmlformats.org/drawingml/2006/main"/>
           <a:p xmlns:a="http://schemas.openxmlformats.org/drawingml/2006/main">
             <a:pPr algn="r">
+              <a:buNone/>
               <a:defRPr sz="1125" b="0">
                 <a:solidFill>
                   <a:srgbClr val="000000"/>
@@ -5652,6 +5712,7 @@
           <a:lstStyle xmlns:a="http://schemas.openxmlformats.org/drawingml/2006/main"/>
           <a:p xmlns:a="http://schemas.openxmlformats.org/drawingml/2006/main">
             <a:pPr algn="l">
+              <a:buNone/>
               <a:defRPr sz="2925" b="0">
                 <a:solidFill>
                   <a:srgbClr val="000000"/>
@@ -5702,6 +5763,7 @@
           <a:lstStyle xmlns:a="http://schemas.openxmlformats.org/drawingml/2006/main"/>
           <a:p xmlns:a="http://schemas.openxmlformats.org/drawingml/2006/main">
             <a:pPr algn="l">
+              <a:buNone/>
               <a:defRPr sz="1650" b="0">
                 <a:solidFill>
                   <a:srgbClr val="555555"/>
@@ -5752,6 +5814,7 @@
           <a:lstStyle xmlns:a="http://schemas.openxmlformats.org/drawingml/2006/main"/>
           <a:p xmlns:a="http://schemas.openxmlformats.org/drawingml/2006/main">
             <a:pPr algn="l">
+              <a:buNone/>
               <a:defRPr sz="1125" b="0">
                 <a:solidFill>
                   <a:srgbClr val="555555"/>
@@ -5802,6 +5865,7 @@
           <a:lstStyle xmlns:a="http://schemas.openxmlformats.org/drawingml/2006/main"/>
           <a:p xmlns:a="http://schemas.openxmlformats.org/drawingml/2006/main">
             <a:pPr algn="r">
+              <a:buNone/>
               <a:defRPr sz="1125" b="0">
                 <a:solidFill>
                   <a:srgbClr val="000000"/>
@@ -5883,6 +5947,7 @@
           <a:lstStyle xmlns:a="http://schemas.openxmlformats.org/drawingml/2006/main"/>
           <a:p xmlns:a="http://schemas.openxmlformats.org/drawingml/2006/main">
             <a:pPr algn="l">
+              <a:buNone/>
               <a:defRPr sz="1275" b="1">
                 <a:solidFill>
                   <a:srgbClr val="FFFFFF"/>
@@ -5933,6 +5998,7 @@
           <a:lstStyle xmlns:a="http://schemas.openxmlformats.org/drawingml/2006/main"/>
           <a:p xmlns:a="http://schemas.openxmlformats.org/drawingml/2006/main">
             <a:pPr algn="l">
+              <a:buNone/>
               <a:defRPr sz="1275" b="1">
                 <a:solidFill>
                   <a:srgbClr val="FFFFFF"/>
@@ -5983,6 +6049,7 @@
           <a:lstStyle xmlns:a="http://schemas.openxmlformats.org/drawingml/2006/main"/>
           <a:p xmlns:a="http://schemas.openxmlformats.org/drawingml/2006/main">
             <a:pPr algn="l">
+              <a:buNone/>
               <a:defRPr sz="1275" b="1">
                 <a:solidFill>
                   <a:srgbClr val="FFFFFF"/>
@@ -6066,6 +6133,7 @@
           <a:lstStyle xmlns:a="http://schemas.openxmlformats.org/drawingml/2006/main"/>
           <a:p xmlns:a="http://schemas.openxmlformats.org/drawingml/2006/main">
             <a:pPr algn="l">
+              <a:buNone/>
               <a:defRPr sz="1500" b="1">
                 <a:solidFill>
                   <a:srgbClr val="000000"/>
@@ -6116,6 +6184,7 @@
           <a:lstStyle xmlns:a="http://schemas.openxmlformats.org/drawingml/2006/main"/>
           <a:p xmlns:a="http://schemas.openxmlformats.org/drawingml/2006/main">
             <a:pPr algn="l">
+              <a:buNone/>
               <a:defRPr sz="1500" b="0">
                 <a:solidFill>
                   <a:srgbClr val="222222"/>
@@ -6166,6 +6235,7 @@
           <a:lstStyle xmlns:a="http://schemas.openxmlformats.org/drawingml/2006/main"/>
           <a:p xmlns:a="http://schemas.openxmlformats.org/drawingml/2006/main">
             <a:pPr algn="l">
+              <a:buNone/>
               <a:defRPr sz="1500" b="0">
                 <a:solidFill>
                   <a:srgbClr val="222222"/>
@@ -6249,6 +6319,7 @@
           <a:lstStyle xmlns:a="http://schemas.openxmlformats.org/drawingml/2006/main"/>
           <a:p xmlns:a="http://schemas.openxmlformats.org/drawingml/2006/main">
             <a:pPr algn="l">
+              <a:buNone/>
               <a:defRPr sz="1500" b="1">
                 <a:solidFill>
                   <a:srgbClr val="000000"/>
@@ -6299,6 +6370,7 @@
           <a:lstStyle xmlns:a="http://schemas.openxmlformats.org/drawingml/2006/main"/>
           <a:p xmlns:a="http://schemas.openxmlformats.org/drawingml/2006/main">
             <a:pPr algn="l">
+              <a:buNone/>
               <a:defRPr sz="1500" b="0">
                 <a:solidFill>
                   <a:srgbClr val="222222"/>
@@ -6349,6 +6421,7 @@
           <a:lstStyle xmlns:a="http://schemas.openxmlformats.org/drawingml/2006/main"/>
           <a:p xmlns:a="http://schemas.openxmlformats.org/drawingml/2006/main">
             <a:pPr algn="l">
+              <a:buNone/>
               <a:defRPr sz="1500" b="0">
                 <a:solidFill>
                   <a:srgbClr val="222222"/>
@@ -6432,6 +6505,7 @@
           <a:lstStyle xmlns:a="http://schemas.openxmlformats.org/drawingml/2006/main"/>
           <a:p xmlns:a="http://schemas.openxmlformats.org/drawingml/2006/main">
             <a:pPr algn="l">
+              <a:buNone/>
               <a:defRPr sz="1500" b="1">
                 <a:solidFill>
                   <a:srgbClr val="000000"/>
@@ -6482,6 +6556,7 @@
           <a:lstStyle xmlns:a="http://schemas.openxmlformats.org/drawingml/2006/main"/>
           <a:p xmlns:a="http://schemas.openxmlformats.org/drawingml/2006/main">
             <a:pPr algn="l">
+              <a:buNone/>
               <a:defRPr sz="1500" b="0">
                 <a:solidFill>
                   <a:srgbClr val="222222"/>
@@ -6532,6 +6607,7 @@
           <a:lstStyle xmlns:a="http://schemas.openxmlformats.org/drawingml/2006/main"/>
           <a:p xmlns:a="http://schemas.openxmlformats.org/drawingml/2006/main">
             <a:pPr algn="l">
+              <a:buNone/>
               <a:defRPr sz="1500" b="0">
                 <a:solidFill>
                   <a:srgbClr val="222222"/>
@@ -6615,6 +6691,7 @@
           <a:lstStyle xmlns:a="http://schemas.openxmlformats.org/drawingml/2006/main"/>
           <a:p xmlns:a="http://schemas.openxmlformats.org/drawingml/2006/main">
             <a:pPr algn="l">
+              <a:buNone/>
               <a:defRPr sz="1500" b="1">
                 <a:solidFill>
                   <a:srgbClr val="000000"/>
@@ -6665,6 +6742,7 @@
           <a:lstStyle xmlns:a="http://schemas.openxmlformats.org/drawingml/2006/main"/>
           <a:p xmlns:a="http://schemas.openxmlformats.org/drawingml/2006/main">
             <a:pPr algn="l">
+              <a:buNone/>
               <a:defRPr sz="1500" b="0">
                 <a:solidFill>
                   <a:srgbClr val="222222"/>
@@ -6715,6 +6793,7 @@
           <a:lstStyle xmlns:a="http://schemas.openxmlformats.org/drawingml/2006/main"/>
           <a:p xmlns:a="http://schemas.openxmlformats.org/drawingml/2006/main">
             <a:pPr algn="l">
+              <a:buNone/>
               <a:defRPr sz="1500" b="0">
                 <a:solidFill>
                   <a:srgbClr val="222222"/>
@@ -6798,6 +6877,7 @@
           <a:lstStyle xmlns:a="http://schemas.openxmlformats.org/drawingml/2006/main"/>
           <a:p xmlns:a="http://schemas.openxmlformats.org/drawingml/2006/main">
             <a:pPr algn="l">
+              <a:buNone/>
               <a:defRPr sz="1500" b="1">
                 <a:solidFill>
                   <a:srgbClr val="000000"/>
@@ -6848,6 +6928,7 @@
           <a:lstStyle xmlns:a="http://schemas.openxmlformats.org/drawingml/2006/main"/>
           <a:p xmlns:a="http://schemas.openxmlformats.org/drawingml/2006/main">
             <a:pPr algn="l">
+              <a:buNone/>
               <a:defRPr sz="1500" b="0">
                 <a:solidFill>
                   <a:srgbClr val="222222"/>
@@ -6898,6 +6979,7 @@
           <a:lstStyle xmlns:a="http://schemas.openxmlformats.org/drawingml/2006/main"/>
           <a:p xmlns:a="http://schemas.openxmlformats.org/drawingml/2006/main">
             <a:pPr algn="l">
+              <a:buNone/>
               <a:defRPr sz="1500" b="0">
                 <a:solidFill>
                   <a:srgbClr val="222222"/>
@@ -6948,6 +7030,7 @@
           <a:lstStyle xmlns:a="http://schemas.openxmlformats.org/drawingml/2006/main"/>
           <a:p xmlns:a="http://schemas.openxmlformats.org/drawingml/2006/main">
             <a:pPr algn="l">
+              <a:buNone/>
               <a:defRPr sz="1350" b="1">
                 <a:solidFill>
                   <a:srgbClr val="000000"/>
@@ -6998,6 +7081,7 @@
           <a:lstStyle xmlns:a="http://schemas.openxmlformats.org/drawingml/2006/main"/>
           <a:p xmlns:a="http://schemas.openxmlformats.org/drawingml/2006/main">
             <a:pPr algn="l">
+              <a:buNone/>
               <a:defRPr sz="1350" b="1">
                 <a:solidFill>
                   <a:srgbClr val="000000"/>
@@ -7048,6 +7132,7 @@
           <a:lstStyle xmlns:a="http://schemas.openxmlformats.org/drawingml/2006/main"/>
           <a:p xmlns:a="http://schemas.openxmlformats.org/drawingml/2006/main">
             <a:pPr algn="l">
+              <a:buNone/>
               <a:defRPr sz="1200" b="0">
                 <a:solidFill>
                   <a:srgbClr val="555555"/>
@@ -7098,6 +7183,7 @@
           <a:lstStyle xmlns:a="http://schemas.openxmlformats.org/drawingml/2006/main"/>
           <a:p xmlns:a="http://schemas.openxmlformats.org/drawingml/2006/main">
             <a:pPr algn="l">
+              <a:buNone/>
               <a:defRPr sz="1350" b="1">
                 <a:solidFill>
                   <a:srgbClr val="000000"/>
@@ -7148,6 +7234,7 @@
           <a:lstStyle xmlns:a="http://schemas.openxmlformats.org/drawingml/2006/main"/>
           <a:p xmlns:a="http://schemas.openxmlformats.org/drawingml/2006/main">
             <a:pPr algn="l">
+              <a:buNone/>
               <a:defRPr sz="1200" b="0">
                 <a:solidFill>
                   <a:srgbClr val="555555"/>
@@ -7198,6 +7285,7 @@
           <a:lstStyle xmlns:a="http://schemas.openxmlformats.org/drawingml/2006/main"/>
           <a:p xmlns:a="http://schemas.openxmlformats.org/drawingml/2006/main">
             <a:pPr algn="l">
+              <a:buNone/>
               <a:defRPr sz="1125" b="0">
                 <a:solidFill>
                   <a:srgbClr val="555555"/>
@@ -7248,6 +7336,7 @@
           <a:lstStyle xmlns:a="http://schemas.openxmlformats.org/drawingml/2006/main"/>
           <a:p xmlns:a="http://schemas.openxmlformats.org/drawingml/2006/main">
             <a:pPr algn="r">
+              <a:buNone/>
               <a:defRPr sz="1125" b="0">
                 <a:solidFill>
                   <a:srgbClr val="000000"/>
@@ -7327,6 +7416,7 @@
           <a:lstStyle xmlns:a="http://schemas.openxmlformats.org/drawingml/2006/main"/>
           <a:p xmlns:a="http://schemas.openxmlformats.org/drawingml/2006/main">
             <a:pPr algn="l">
+              <a:buNone/>
               <a:defRPr sz="2925" b="0">
                 <a:solidFill>
                   <a:srgbClr val="000000"/>
@@ -7377,6 +7467,7 @@
           <a:lstStyle xmlns:a="http://schemas.openxmlformats.org/drawingml/2006/main"/>
           <a:p xmlns:a="http://schemas.openxmlformats.org/drawingml/2006/main">
             <a:pPr algn="l">
+              <a:buNone/>
               <a:defRPr sz="1650" b="0">
                 <a:solidFill>
                   <a:srgbClr val="555555"/>
@@ -7427,6 +7518,7 @@
           <a:lstStyle xmlns:a="http://schemas.openxmlformats.org/drawingml/2006/main"/>
           <a:p xmlns:a="http://schemas.openxmlformats.org/drawingml/2006/main">
             <a:pPr algn="l">
+              <a:buNone/>
               <a:defRPr sz="1125" b="0">
                 <a:solidFill>
                   <a:srgbClr val="555555"/>
@@ -7477,6 +7569,7 @@
           <a:lstStyle xmlns:a="http://schemas.openxmlformats.org/drawingml/2006/main"/>
           <a:p xmlns:a="http://schemas.openxmlformats.org/drawingml/2006/main">
             <a:pPr algn="r">
+              <a:buNone/>
               <a:defRPr sz="1125" b="0">
                 <a:solidFill>
                   <a:srgbClr val="000000"/>
@@ -7560,6 +7653,7 @@
           <a:lstStyle xmlns:a="http://schemas.openxmlformats.org/drawingml/2006/main"/>
           <a:p xmlns:a="http://schemas.openxmlformats.org/drawingml/2006/main">
             <a:pPr algn="l">
+              <a:buNone/>
               <a:defRPr sz="1200" b="1">
                 <a:solidFill>
                   <a:srgbClr val="555555"/>
@@ -7610,6 +7704,7 @@
           <a:lstStyle xmlns:a="http://schemas.openxmlformats.org/drawingml/2006/main"/>
           <a:p xmlns:a="http://schemas.openxmlformats.org/drawingml/2006/main">
             <a:pPr algn="l">
+              <a:buNone/>
               <a:defRPr sz="1950" b="0">
                 <a:solidFill>
                   <a:srgbClr val="000000"/>
@@ -7660,6 +7755,7 @@
           <a:lstStyle xmlns:a="http://schemas.openxmlformats.org/drawingml/2006/main"/>
           <a:p xmlns:a="http://schemas.openxmlformats.org/drawingml/2006/main">
             <a:pPr algn="l">
+              <a:buNone/>
               <a:defRPr sz="1350" b="0">
                 <a:solidFill>
                   <a:srgbClr val="222222"/>
@@ -7774,6 +7870,7 @@
           <a:lstStyle xmlns:a="http://schemas.openxmlformats.org/drawingml/2006/main"/>
           <a:p xmlns:a="http://schemas.openxmlformats.org/drawingml/2006/main">
             <a:pPr algn="l">
+              <a:buNone/>
               <a:defRPr sz="1200" b="1">
                 <a:solidFill>
                   <a:srgbClr val="555555"/>
@@ -7824,6 +7921,7 @@
           <a:lstStyle xmlns:a="http://schemas.openxmlformats.org/drawingml/2006/main"/>
           <a:p xmlns:a="http://schemas.openxmlformats.org/drawingml/2006/main">
             <a:pPr algn="l">
+              <a:buNone/>
               <a:defRPr sz="1950" b="0">
                 <a:solidFill>
                   <a:srgbClr val="000000"/>
@@ -7874,6 +7972,7 @@
           <a:lstStyle xmlns:a="http://schemas.openxmlformats.org/drawingml/2006/main"/>
           <a:p xmlns:a="http://schemas.openxmlformats.org/drawingml/2006/main">
             <a:pPr algn="l">
+              <a:buNone/>
               <a:defRPr sz="1350" b="0">
                 <a:solidFill>
                   <a:srgbClr val="222222"/>
@@ -7988,6 +8087,7 @@
           <a:lstStyle xmlns:a="http://schemas.openxmlformats.org/drawingml/2006/main"/>
           <a:p xmlns:a="http://schemas.openxmlformats.org/drawingml/2006/main">
             <a:pPr algn="l">
+              <a:buNone/>
               <a:defRPr sz="1200" b="1">
                 <a:solidFill>
                   <a:srgbClr val="555555"/>
@@ -8038,6 +8138,7 @@
           <a:lstStyle xmlns:a="http://schemas.openxmlformats.org/drawingml/2006/main"/>
           <a:p xmlns:a="http://schemas.openxmlformats.org/drawingml/2006/main">
             <a:pPr algn="l">
+              <a:buNone/>
               <a:defRPr sz="1950" b="0">
                 <a:solidFill>
                   <a:srgbClr val="000000"/>
@@ -8088,6 +8189,7 @@
           <a:lstStyle xmlns:a="http://schemas.openxmlformats.org/drawingml/2006/main"/>
           <a:p xmlns:a="http://schemas.openxmlformats.org/drawingml/2006/main">
             <a:pPr algn="l">
+              <a:buNone/>
               <a:defRPr sz="1350" b="0">
                 <a:solidFill>
                   <a:srgbClr val="222222"/>
@@ -8138,6 +8240,7 @@
           <a:lstStyle xmlns:a="http://schemas.openxmlformats.org/drawingml/2006/main"/>
           <a:p xmlns:a="http://schemas.openxmlformats.org/drawingml/2006/main">
             <a:pPr algn="l">
+              <a:buNone/>
               <a:defRPr sz="1875" b="0">
                 <a:solidFill>
                   <a:srgbClr val="000000"/>
@@ -8217,6 +8320,7 @@
           <a:lstStyle xmlns:a="http://schemas.openxmlformats.org/drawingml/2006/main"/>
           <a:p xmlns:a="http://schemas.openxmlformats.org/drawingml/2006/main">
             <a:pPr algn="l">
+              <a:buNone/>
               <a:defRPr sz="2925" b="0">
                 <a:solidFill>
                   <a:srgbClr val="000000"/>
@@ -8267,6 +8371,7 @@
           <a:lstStyle xmlns:a="http://schemas.openxmlformats.org/drawingml/2006/main"/>
           <a:p xmlns:a="http://schemas.openxmlformats.org/drawingml/2006/main">
             <a:pPr algn="l">
+              <a:buNone/>
               <a:defRPr sz="1650" b="0">
                 <a:solidFill>
                   <a:srgbClr val="555555"/>
@@ -8317,6 +8422,7 @@
           <a:lstStyle xmlns:a="http://schemas.openxmlformats.org/drawingml/2006/main"/>
           <a:p xmlns:a="http://schemas.openxmlformats.org/drawingml/2006/main">
             <a:pPr algn="l">
+              <a:buNone/>
               <a:defRPr sz="1125" b="0">
                 <a:solidFill>
                   <a:srgbClr val="555555"/>
@@ -8367,6 +8473,7 @@
           <a:lstStyle xmlns:a="http://schemas.openxmlformats.org/drawingml/2006/main"/>
           <a:p xmlns:a="http://schemas.openxmlformats.org/drawingml/2006/main">
             <a:pPr algn="r">
+              <a:buNone/>
               <a:defRPr sz="1125" b="0">
                 <a:solidFill>
                   <a:srgbClr val="000000"/>
@@ -8417,6 +8524,7 @@
           <a:lstStyle xmlns:a="http://schemas.openxmlformats.org/drawingml/2006/main"/>
           <a:p xmlns:a="http://schemas.openxmlformats.org/drawingml/2006/main">
             <a:pPr algn="l">
+              <a:buNone/>
               <a:defRPr sz="4200" b="1">
                 <a:solidFill>
                   <a:srgbClr val="FF6B35"/>
@@ -8467,6 +8575,7 @@
           <a:lstStyle xmlns:a="http://schemas.openxmlformats.org/drawingml/2006/main"/>
           <a:p xmlns:a="http://schemas.openxmlformats.org/drawingml/2006/main">
             <a:pPr algn="l">
+              <a:buNone/>
               <a:defRPr sz="2550" b="0">
                 <a:solidFill>
                   <a:srgbClr val="000000"/>
@@ -8548,6 +8657,7 @@
           <a:lstStyle xmlns:a="http://schemas.openxmlformats.org/drawingml/2006/main"/>
           <a:p xmlns:a="http://schemas.openxmlformats.org/drawingml/2006/main">
             <a:pPr algn="l">
+              <a:buNone/>
               <a:defRPr sz="1650" b="0">
                 <a:solidFill>
                   <a:srgbClr val="222222"/>
@@ -8629,6 +8739,7 @@
           <a:lstStyle xmlns:a="http://schemas.openxmlformats.org/drawingml/2006/main"/>
           <a:p xmlns:a="http://schemas.openxmlformats.org/drawingml/2006/main">
             <a:pPr algn="l">
+              <a:buNone/>
               <a:defRPr sz="1650" b="0">
                 <a:solidFill>
                   <a:srgbClr val="222222"/>
@@ -8710,6 +8821,7 @@
           <a:lstStyle xmlns:a="http://schemas.openxmlformats.org/drawingml/2006/main"/>
           <a:p xmlns:a="http://schemas.openxmlformats.org/drawingml/2006/main">
             <a:pPr algn="l">
+              <a:buNone/>
               <a:defRPr sz="1650" b="0">
                 <a:solidFill>
                   <a:srgbClr val="222222"/>
@@ -8793,6 +8905,7 @@
           <a:lstStyle xmlns:a="http://schemas.openxmlformats.org/drawingml/2006/main"/>
           <a:p xmlns:a="http://schemas.openxmlformats.org/drawingml/2006/main">
             <a:pPr algn="l">
+              <a:buNone/>
               <a:defRPr sz="1350" b="0">
                 <a:solidFill>
                   <a:srgbClr val="000000"/>
@@ -8872,6 +8985,7 @@
           <a:lstStyle xmlns:a="http://schemas.openxmlformats.org/drawingml/2006/main"/>
           <a:p xmlns:a="http://schemas.openxmlformats.org/drawingml/2006/main">
             <a:pPr algn="l">
+              <a:buNone/>
               <a:defRPr sz="2925" b="0">
                 <a:solidFill>
                   <a:srgbClr val="000000"/>
@@ -8922,6 +9036,7 @@
           <a:lstStyle xmlns:a="http://schemas.openxmlformats.org/drawingml/2006/main"/>
           <a:p xmlns:a="http://schemas.openxmlformats.org/drawingml/2006/main">
             <a:pPr algn="l">
+              <a:buNone/>
               <a:defRPr sz="1650" b="0">
                 <a:solidFill>
                   <a:srgbClr val="555555"/>
@@ -8972,6 +9087,7 @@
           <a:lstStyle xmlns:a="http://schemas.openxmlformats.org/drawingml/2006/main"/>
           <a:p xmlns:a="http://schemas.openxmlformats.org/drawingml/2006/main">
             <a:pPr algn="l">
+              <a:buNone/>
               <a:defRPr sz="1125" b="0">
                 <a:solidFill>
                   <a:srgbClr val="555555"/>
@@ -9022,6 +9138,7 @@
           <a:lstStyle xmlns:a="http://schemas.openxmlformats.org/drawingml/2006/main"/>
           <a:p xmlns:a="http://schemas.openxmlformats.org/drawingml/2006/main">
             <a:pPr algn="r">
+              <a:buNone/>
               <a:defRPr sz="1125" b="0">
                 <a:solidFill>
                   <a:srgbClr val="000000"/>
@@ -9103,6 +9220,7 @@
           <a:lstStyle xmlns:a="http://schemas.openxmlformats.org/drawingml/2006/main"/>
           <a:p xmlns:a="http://schemas.openxmlformats.org/drawingml/2006/main">
             <a:pPr algn="l">
+              <a:buNone/>
               <a:defRPr sz="1200" b="1">
                 <a:solidFill>
                   <a:srgbClr val="FFFFFF"/>
@@ -9153,6 +9271,7 @@
           <a:lstStyle xmlns:a="http://schemas.openxmlformats.org/drawingml/2006/main"/>
           <a:p xmlns:a="http://schemas.openxmlformats.org/drawingml/2006/main">
             <a:pPr algn="l">
+              <a:buNone/>
               <a:defRPr sz="1350" b="0">
                 <a:solidFill>
                   <a:srgbClr val="FFFFFF"/>
@@ -9170,6 +9289,7 @@
           </a:p>
           <a:p xmlns:a="http://schemas.openxmlformats.org/drawingml/2006/main">
             <a:pPr algn="l">
+              <a:buNone/>
               <a:defRPr sz="1350" b="0">
                 <a:solidFill>
                   <a:srgbClr val="FFFFFF"/>
@@ -9187,6 +9307,7 @@
           </a:p>
           <a:p xmlns:a="http://schemas.openxmlformats.org/drawingml/2006/main">
             <a:pPr algn="l">
+              <a:buNone/>
               <a:defRPr sz="1350" b="0">
                 <a:solidFill>
                   <a:srgbClr val="FFFFFF"/>
@@ -9204,6 +9325,7 @@
           </a:p>
           <a:p xmlns:a="http://schemas.openxmlformats.org/drawingml/2006/main">
             <a:pPr algn="l">
+              <a:buNone/>
               <a:defRPr sz="1350" b="0">
                 <a:solidFill>
                   <a:srgbClr val="FFFFFF"/>
@@ -9221,6 +9343,7 @@
           </a:p>
           <a:p xmlns:a="http://schemas.openxmlformats.org/drawingml/2006/main">
             <a:pPr algn="l">
+              <a:buNone/>
               <a:defRPr sz="1350" b="0">
                 <a:solidFill>
                   <a:srgbClr val="FFFFFF"/>
@@ -9238,6 +9361,7 @@
           </a:p>
           <a:p xmlns:a="http://schemas.openxmlformats.org/drawingml/2006/main">
             <a:pPr algn="l">
+              <a:buNone/>
               <a:defRPr sz="1350" b="0">
                 <a:solidFill>
                   <a:srgbClr val="FFFFFF"/>
@@ -9255,6 +9379,7 @@
           </a:p>
           <a:p xmlns:a="http://schemas.openxmlformats.org/drawingml/2006/main">
             <a:pPr algn="l">
+              <a:buNone/>
               <a:defRPr sz="1350" b="0">
                 <a:solidFill>
                   <a:srgbClr val="FFFFFF"/>
@@ -9272,6 +9397,7 @@
           </a:p>
           <a:p xmlns:a="http://schemas.openxmlformats.org/drawingml/2006/main">
             <a:pPr algn="l">
+              <a:buNone/>
               <a:defRPr sz="1350" b="0">
                 <a:solidFill>
                   <a:srgbClr val="FFFFFF"/>
@@ -9353,6 +9479,7 @@
           <a:lstStyle xmlns:a="http://schemas.openxmlformats.org/drawingml/2006/main"/>
           <a:p xmlns:a="http://schemas.openxmlformats.org/drawingml/2006/main">
             <a:pPr algn="l">
+              <a:buNone/>
               <a:defRPr sz="2100" b="0">
                 <a:solidFill>
                   <a:srgbClr val="000000"/>
@@ -9434,6 +9561,7 @@
           <a:lstStyle xmlns:a="http://schemas.openxmlformats.org/drawingml/2006/main"/>
           <a:p xmlns:a="http://schemas.openxmlformats.org/drawingml/2006/main">
             <a:pPr algn="l">
+              <a:buNone/>
               <a:defRPr sz="1650" b="0">
                 <a:solidFill>
                   <a:srgbClr val="222222"/>
@@ -9515,6 +9643,7 @@
           <a:lstStyle xmlns:a="http://schemas.openxmlformats.org/drawingml/2006/main"/>
           <a:p xmlns:a="http://schemas.openxmlformats.org/drawingml/2006/main">
             <a:pPr algn="l">
+              <a:buNone/>
               <a:defRPr sz="1650" b="0">
                 <a:solidFill>
                   <a:srgbClr val="222222"/>
@@ -9596,6 +9725,7 @@
           <a:lstStyle xmlns:a="http://schemas.openxmlformats.org/drawingml/2006/main"/>
           <a:p xmlns:a="http://schemas.openxmlformats.org/drawingml/2006/main">
             <a:pPr algn="l">
+              <a:buNone/>
               <a:defRPr sz="1650" b="0">
                 <a:solidFill>
                   <a:srgbClr val="222222"/>
@@ -9646,6 +9776,7 @@
           <a:lstStyle xmlns:a="http://schemas.openxmlformats.org/drawingml/2006/main"/>
           <a:p xmlns:a="http://schemas.openxmlformats.org/drawingml/2006/main">
             <a:pPr algn="l">
+              <a:buNone/>
               <a:defRPr sz="1125" b="0">
                 <a:solidFill>
                   <a:srgbClr val="555555"/>
@@ -9696,6 +9827,7 @@
           <a:lstStyle xmlns:a="http://schemas.openxmlformats.org/drawingml/2006/main"/>
           <a:p xmlns:a="http://schemas.openxmlformats.org/drawingml/2006/main">
             <a:pPr algn="r">
+              <a:buNone/>
               <a:defRPr sz="1125" b="0">
                 <a:solidFill>
                   <a:srgbClr val="000000"/>
@@ -9775,6 +9907,7 @@
           <a:lstStyle xmlns:a="http://schemas.openxmlformats.org/drawingml/2006/main"/>
           <a:p xmlns:a="http://schemas.openxmlformats.org/drawingml/2006/main">
             <a:pPr algn="l">
+              <a:buNone/>
               <a:defRPr sz="2925" b="0">
                 <a:solidFill>
                   <a:srgbClr val="000000"/>
@@ -9825,6 +9958,7 @@
           <a:lstStyle xmlns:a="http://schemas.openxmlformats.org/drawingml/2006/main"/>
           <a:p xmlns:a="http://schemas.openxmlformats.org/drawingml/2006/main">
             <a:pPr algn="l">
+              <a:buNone/>
               <a:defRPr sz="1650" b="0">
                 <a:solidFill>
                   <a:srgbClr val="555555"/>
@@ -9875,6 +10009,7 @@
           <a:lstStyle xmlns:a="http://schemas.openxmlformats.org/drawingml/2006/main"/>
           <a:p xmlns:a="http://schemas.openxmlformats.org/drawingml/2006/main">
             <a:pPr algn="l">
+              <a:buNone/>
               <a:defRPr sz="1125" b="0">
                 <a:solidFill>
                   <a:srgbClr val="555555"/>
@@ -9925,6 +10060,7 @@
           <a:lstStyle xmlns:a="http://schemas.openxmlformats.org/drawingml/2006/main"/>
           <a:p xmlns:a="http://schemas.openxmlformats.org/drawingml/2006/main">
             <a:pPr algn="r">
+              <a:buNone/>
               <a:defRPr sz="1125" b="0">
                 <a:solidFill>
                   <a:srgbClr val="000000"/>
@@ -9975,6 +10111,7 @@
           <a:lstStyle xmlns:a="http://schemas.openxmlformats.org/drawingml/2006/main"/>
           <a:p xmlns:a="http://schemas.openxmlformats.org/drawingml/2006/main">
             <a:pPr algn="l">
+              <a:buNone/>
               <a:defRPr sz="4200" b="1">
                 <a:solidFill>
                   <a:srgbClr val="FF6B35"/>
@@ -10025,6 +10162,7 @@
           <a:lstStyle xmlns:a="http://schemas.openxmlformats.org/drawingml/2006/main"/>
           <a:p xmlns:a="http://schemas.openxmlformats.org/drawingml/2006/main">
             <a:pPr algn="l">
+              <a:buNone/>
               <a:defRPr sz="2550" b="0">
                 <a:solidFill>
                   <a:srgbClr val="000000"/>
@@ -10106,6 +10244,7 @@
           <a:lstStyle xmlns:a="http://schemas.openxmlformats.org/drawingml/2006/main"/>
           <a:p xmlns:a="http://schemas.openxmlformats.org/drawingml/2006/main">
             <a:pPr algn="l">
+              <a:buNone/>
               <a:defRPr sz="2250" b="0">
                 <a:solidFill>
                   <a:srgbClr val="000000"/>
@@ -10156,6 +10295,7 @@
           <a:lstStyle xmlns:a="http://schemas.openxmlformats.org/drawingml/2006/main"/>
           <a:p xmlns:a="http://schemas.openxmlformats.org/drawingml/2006/main">
             <a:pPr algn="l">
+              <a:buNone/>
               <a:defRPr sz="1575" b="0">
                 <a:solidFill>
                   <a:srgbClr val="222222"/>
@@ -10173,6 +10313,7 @@
           </a:p>
           <a:p xmlns:a="http://schemas.openxmlformats.org/drawingml/2006/main">
             <a:pPr algn="l">
+              <a:buNone/>
               <a:defRPr sz="1575" b="0">
                 <a:solidFill>
                   <a:srgbClr val="222222"/>
@@ -10190,6 +10331,7 @@
           </a:p>
           <a:p xmlns:a="http://schemas.openxmlformats.org/drawingml/2006/main">
             <a:pPr algn="l">
+              <a:buNone/>
               <a:defRPr sz="1575" b="0">
                 <a:solidFill>
                   <a:srgbClr val="222222"/>
@@ -10273,6 +10415,7 @@
           <a:lstStyle xmlns:a="http://schemas.openxmlformats.org/drawingml/2006/main"/>
           <a:p xmlns:a="http://schemas.openxmlformats.org/drawingml/2006/main">
             <a:pPr algn="l">
+              <a:buNone/>
               <a:defRPr sz="2250" b="0">
                 <a:solidFill>
                   <a:srgbClr val="000000"/>
@@ -10323,6 +10466,7 @@
           <a:lstStyle xmlns:a="http://schemas.openxmlformats.org/drawingml/2006/main"/>
           <a:p xmlns:a="http://schemas.openxmlformats.org/drawingml/2006/main">
             <a:pPr algn="l">
+              <a:buNone/>
               <a:defRPr sz="1575" b="0">
                 <a:solidFill>
                   <a:srgbClr val="222222"/>
@@ -10340,6 +10484,7 @@
           </a:p>
           <a:p xmlns:a="http://schemas.openxmlformats.org/drawingml/2006/main">
             <a:pPr algn="l">
+              <a:buNone/>
               <a:defRPr sz="1575" b="0">
                 <a:solidFill>
                   <a:srgbClr val="222222"/>
@@ -10357,6 +10502,7 @@
           </a:p>
           <a:p xmlns:a="http://schemas.openxmlformats.org/drawingml/2006/main">
             <a:pPr algn="l">
+              <a:buNone/>
               <a:defRPr sz="1575" b="0">
                 <a:solidFill>
                   <a:srgbClr val="222222"/>
@@ -10438,6 +10584,7 @@
           <a:lstStyle xmlns:a="http://schemas.openxmlformats.org/drawingml/2006/main"/>
           <a:p xmlns:a="http://schemas.openxmlformats.org/drawingml/2006/main">
             <a:pPr algn="l">
+              <a:buNone/>
               <a:defRPr sz="1800" b="0">
                 <a:solidFill>
                   <a:srgbClr val="000000"/>
@@ -10488,6 +10635,7 @@
           <a:lstStyle xmlns:a="http://schemas.openxmlformats.org/drawingml/2006/main"/>
           <a:p xmlns:a="http://schemas.openxmlformats.org/drawingml/2006/main">
             <a:pPr algn="l">
+              <a:buNone/>
               <a:defRPr sz="1125" b="0">
                 <a:solidFill>
                   <a:srgbClr val="555555"/>
@@ -10538,6 +10686,7 @@
           <a:lstStyle xmlns:a="http://schemas.openxmlformats.org/drawingml/2006/main"/>
           <a:p xmlns:a="http://schemas.openxmlformats.org/drawingml/2006/main">
             <a:pPr algn="r">
+              <a:buNone/>
               <a:defRPr sz="1125" b="0">
                 <a:solidFill>
                   <a:srgbClr val="000000"/>
@@ -10617,6 +10766,7 @@
           <a:lstStyle xmlns:a="http://schemas.openxmlformats.org/drawingml/2006/main"/>
           <a:p xmlns:a="http://schemas.openxmlformats.org/drawingml/2006/main">
             <a:pPr algn="l">
+              <a:buNone/>
               <a:defRPr sz="2925" b="0">
                 <a:solidFill>
                   <a:srgbClr val="000000"/>
@@ -10667,6 +10817,7 @@
           <a:lstStyle xmlns:a="http://schemas.openxmlformats.org/drawingml/2006/main"/>
           <a:p xmlns:a="http://schemas.openxmlformats.org/drawingml/2006/main">
             <a:pPr algn="l">
+              <a:buNone/>
               <a:defRPr sz="1650" b="0">
                 <a:solidFill>
                   <a:srgbClr val="555555"/>
@@ -10717,6 +10868,7 @@
           <a:lstStyle xmlns:a="http://schemas.openxmlformats.org/drawingml/2006/main"/>
           <a:p xmlns:a="http://schemas.openxmlformats.org/drawingml/2006/main">
             <a:pPr algn="l">
+              <a:buNone/>
               <a:defRPr sz="1125" b="0">
                 <a:solidFill>
                   <a:srgbClr val="555555"/>
@@ -10767,6 +10919,7 @@
           <a:lstStyle xmlns:a="http://schemas.openxmlformats.org/drawingml/2006/main"/>
           <a:p xmlns:a="http://schemas.openxmlformats.org/drawingml/2006/main">
             <a:pPr algn="r">
+              <a:buNone/>
               <a:defRPr sz="1125" b="0">
                 <a:solidFill>
                   <a:srgbClr val="000000"/>
@@ -10848,6 +11001,7 @@
           <a:lstStyle xmlns:a="http://schemas.openxmlformats.org/drawingml/2006/main"/>
           <a:p xmlns:a="http://schemas.openxmlformats.org/drawingml/2006/main">
             <a:pPr algn="l">
+              <a:buNone/>
               <a:defRPr sz="1200" b="1">
                 <a:solidFill>
                   <a:srgbClr val="FFFFFF"/>
@@ -10898,6 +11052,7 @@
           <a:lstStyle xmlns:a="http://schemas.openxmlformats.org/drawingml/2006/main"/>
           <a:p xmlns:a="http://schemas.openxmlformats.org/drawingml/2006/main">
             <a:pPr algn="l">
+              <a:buNone/>
               <a:defRPr sz="1350" b="0">
                 <a:solidFill>
                   <a:srgbClr val="FFFFFF"/>
@@ -10910,11 +11065,12 @@
                   <a:srgbClr val="FFFFFF"/>
                 </a:solidFill>
               </a:rPr>
-              <a:t>def score(task, skill):</a:t>
-            </a:r>
-          </a:p>
-          <a:p xmlns:a="http://schemas.openxmlformats.org/drawingml/2006/main">
-            <a:pPr algn="l">
+              <a:t>def score(task: str, skill: Skill) -&gt; int:</a:t>
+            </a:r>
+          </a:p>
+          <a:p xmlns:a="http://schemas.openxmlformats.org/drawingml/2006/main">
+            <a:pPr algn="l">
+              <a:buNone/>
               <a:defRPr sz="1350" b="0">
                 <a:solidFill>
                   <a:srgbClr val="FFFFFF"/>
@@ -10927,11 +11083,12 @@
                   <a:srgbClr val="FFFFFF"/>
                 </a:solidFill>
               </a:rPr>
-              <a:t>    haystack = f"{skill.name} {skill.description}".lower()</a:t>
-            </a:r>
-          </a:p>
-          <a:p xmlns:a="http://schemas.openxmlformats.org/drawingml/2006/main">
-            <a:pPr algn="l">
+              <a:t>    haystack = tokenize(</a:t>
+            </a:r>
+          </a:p>
+          <a:p xmlns:a="http://schemas.openxmlformats.org/drawingml/2006/main">
+            <a:pPr algn="l">
+              <a:buNone/>
               <a:defRPr sz="1350" b="0">
                 <a:solidFill>
                   <a:srgbClr val="FFFFFF"/>
@@ -10944,11 +11101,12 @@
                   <a:srgbClr val="FFFFFF"/>
                 </a:solidFill>
               </a:rPr>
-              <a:t>    return sum(</a:t>
-            </a:r>
-          </a:p>
-          <a:p xmlns:a="http://schemas.openxmlformats.org/drawingml/2006/main">
-            <a:pPr algn="l">
+              <a:t>        f"{skill.name.replace('-', ' ')} {skill.description}"</a:t>
+            </a:r>
+          </a:p>
+          <a:p xmlns:a="http://schemas.openxmlformats.org/drawingml/2006/main">
+            <a:pPr algn="l">
+              <a:buNone/>
               <a:defRPr sz="1350" b="0">
                 <a:solidFill>
                   <a:srgbClr val="FFFFFF"/>
@@ -10961,11 +11119,12 @@
                   <a:srgbClr val="FFFFFF"/>
                 </a:solidFill>
               </a:rPr>
-              <a:t>        1 for word in task.lower().split()</a:t>
-            </a:r>
-          </a:p>
-          <a:p xmlns:a="http://schemas.openxmlformats.org/drawingml/2006/main">
-            <a:pPr algn="l">
+              <a:t>    )</a:t>
+            </a:r>
+          </a:p>
+          <a:p xmlns:a="http://schemas.openxmlformats.org/drawingml/2006/main">
+            <a:pPr algn="l">
+              <a:buNone/>
               <a:defRPr sz="1350" b="0">
                 <a:solidFill>
                   <a:srgbClr val="FFFFFF"/>
@@ -10978,24 +11137,7 @@
                   <a:srgbClr val="FFFFFF"/>
                 </a:solidFill>
               </a:rPr>
-              <a:t>        if word.strip(".,!?") in haystack</a:t>
-            </a:r>
-          </a:p>
-          <a:p xmlns:a="http://schemas.openxmlformats.org/drawingml/2006/main">
-            <a:pPr algn="l">
-              <a:defRPr sz="1350" b="0">
-                <a:solidFill>
-                  <a:srgbClr val="FFFFFF"/>
-                </a:solidFill>
-              </a:defRPr>
-            </a:pPr>
-            <a:r>
-              <a:rPr sz="1350" b="0">
-                <a:solidFill>
-                  <a:srgbClr val="FFFFFF"/>
-                </a:solidFill>
-              </a:rPr>
-              <a:t>    )</a:t>
+              <a:t>    return len(tokenize(task) &amp; haystack)</a:t>
             </a:r>
           </a:p>
         </p:txBody>
@@ -11066,6 +11208,7 @@
           <a:lstStyle xmlns:a="http://schemas.openxmlformats.org/drawingml/2006/main"/>
           <a:p xmlns:a="http://schemas.openxmlformats.org/drawingml/2006/main">
             <a:pPr algn="l">
+              <a:buNone/>
               <a:defRPr sz="1350" b="0">
                 <a:solidFill>
                   <a:srgbClr val="000000"/>
@@ -11147,6 +11290,7 @@
           <a:lstStyle xmlns:a="http://schemas.openxmlformats.org/drawingml/2006/main"/>
           <a:p xmlns:a="http://schemas.openxmlformats.org/drawingml/2006/main">
             <a:pPr algn="l">
+              <a:buNone/>
               <a:defRPr sz="2250" b="0">
                 <a:solidFill>
                   <a:srgbClr val="000000"/>
@@ -11197,6 +11341,7 @@
           <a:lstStyle xmlns:a="http://schemas.openxmlformats.org/drawingml/2006/main"/>
           <a:p xmlns:a="http://schemas.openxmlformats.org/drawingml/2006/main">
             <a:pPr algn="l">
+              <a:buNone/>
               <a:defRPr sz="1650" b="0">
                 <a:solidFill>
                   <a:srgbClr val="222222"/>
@@ -11247,6 +11392,7 @@
           <a:lstStyle xmlns:a="http://schemas.openxmlformats.org/drawingml/2006/main"/>
           <a:p xmlns:a="http://schemas.openxmlformats.org/drawingml/2006/main">
             <a:pPr algn="l">
+              <a:buNone/>
               <a:defRPr sz="1125" b="0">
                 <a:solidFill>
                   <a:srgbClr val="555555"/>
@@ -11297,6 +11443,7 @@
           <a:lstStyle xmlns:a="http://schemas.openxmlformats.org/drawingml/2006/main"/>
           <a:p xmlns:a="http://schemas.openxmlformats.org/drawingml/2006/main">
             <a:pPr algn="r">
+              <a:buNone/>
               <a:defRPr sz="1125" b="0">
                 <a:solidFill>
                   <a:srgbClr val="000000"/>
@@ -11376,6 +11523,7 @@
           <a:lstStyle xmlns:a="http://schemas.openxmlformats.org/drawingml/2006/main"/>
           <a:p xmlns:a="http://schemas.openxmlformats.org/drawingml/2006/main">
             <a:pPr algn="l">
+              <a:buNone/>
               <a:defRPr sz="2925" b="0">
                 <a:solidFill>
                   <a:srgbClr val="000000"/>
@@ -11426,6 +11574,7 @@
           <a:lstStyle xmlns:a="http://schemas.openxmlformats.org/drawingml/2006/main"/>
           <a:p xmlns:a="http://schemas.openxmlformats.org/drawingml/2006/main">
             <a:pPr algn="l">
+              <a:buNone/>
               <a:defRPr sz="1650" b="0">
                 <a:solidFill>
                   <a:srgbClr val="555555"/>
@@ -11476,6 +11625,7 @@
           <a:lstStyle xmlns:a="http://schemas.openxmlformats.org/drawingml/2006/main"/>
           <a:p xmlns:a="http://schemas.openxmlformats.org/drawingml/2006/main">
             <a:pPr algn="l">
+              <a:buNone/>
               <a:defRPr sz="1125" b="0">
                 <a:solidFill>
                   <a:srgbClr val="555555"/>
@@ -11526,6 +11676,7 @@
           <a:lstStyle xmlns:a="http://schemas.openxmlformats.org/drawingml/2006/main"/>
           <a:p xmlns:a="http://schemas.openxmlformats.org/drawingml/2006/main">
             <a:pPr algn="r">
+              <a:buNone/>
               <a:defRPr sz="1125" b="0">
                 <a:solidFill>
                   <a:srgbClr val="000000"/>
@@ -11576,6 +11727,7 @@
           <a:lstStyle xmlns:a="http://schemas.openxmlformats.org/drawingml/2006/main"/>
           <a:p xmlns:a="http://schemas.openxmlformats.org/drawingml/2006/main">
             <a:pPr algn="l">
+              <a:buNone/>
               <a:defRPr sz="4200" b="1">
                 <a:solidFill>
                   <a:srgbClr val="FF6B35"/>
@@ -11626,6 +11778,7 @@
           <a:lstStyle xmlns:a="http://schemas.openxmlformats.org/drawingml/2006/main"/>
           <a:p xmlns:a="http://schemas.openxmlformats.org/drawingml/2006/main">
             <a:pPr algn="l">
+              <a:buNone/>
               <a:defRPr sz="2550" b="0">
                 <a:solidFill>
                   <a:srgbClr val="000000"/>
@@ -11709,6 +11862,7 @@
           <a:lstStyle xmlns:a="http://schemas.openxmlformats.org/drawingml/2006/main"/>
           <a:p xmlns:a="http://schemas.openxmlformats.org/drawingml/2006/main">
             <a:pPr algn="l">
+              <a:buNone/>
               <a:defRPr sz="1200" b="1">
                 <a:solidFill>
                   <a:srgbClr val="555555"/>
@@ -11759,6 +11913,7 @@
           <a:lstStyle xmlns:a="http://schemas.openxmlformats.org/drawingml/2006/main"/>
           <a:p xmlns:a="http://schemas.openxmlformats.org/drawingml/2006/main">
             <a:pPr algn="l">
+              <a:buNone/>
               <a:defRPr sz="1950" b="0">
                 <a:solidFill>
                   <a:srgbClr val="000000"/>
@@ -11809,6 +11964,7 @@
           <a:lstStyle xmlns:a="http://schemas.openxmlformats.org/drawingml/2006/main"/>
           <a:p xmlns:a="http://schemas.openxmlformats.org/drawingml/2006/main">
             <a:pPr algn="l">
+              <a:buNone/>
               <a:defRPr sz="1350" b="0">
                 <a:solidFill>
                   <a:srgbClr val="222222"/>
@@ -11923,6 +12079,7 @@
           <a:lstStyle xmlns:a="http://schemas.openxmlformats.org/drawingml/2006/main"/>
           <a:p xmlns:a="http://schemas.openxmlformats.org/drawingml/2006/main">
             <a:pPr algn="l">
+              <a:buNone/>
               <a:defRPr sz="1200" b="1">
                 <a:solidFill>
                   <a:srgbClr val="555555"/>
@@ -11973,6 +12130,7 @@
           <a:lstStyle xmlns:a="http://schemas.openxmlformats.org/drawingml/2006/main"/>
           <a:p xmlns:a="http://schemas.openxmlformats.org/drawingml/2006/main">
             <a:pPr algn="l">
+              <a:buNone/>
               <a:defRPr sz="1950" b="0">
                 <a:solidFill>
                   <a:srgbClr val="000000"/>
@@ -12023,6 +12181,7 @@
           <a:lstStyle xmlns:a="http://schemas.openxmlformats.org/drawingml/2006/main"/>
           <a:p xmlns:a="http://schemas.openxmlformats.org/drawingml/2006/main">
             <a:pPr algn="l">
+              <a:buNone/>
               <a:defRPr sz="1350" b="0">
                 <a:solidFill>
                   <a:srgbClr val="222222"/>
@@ -12137,6 +12296,7 @@
           <a:lstStyle xmlns:a="http://schemas.openxmlformats.org/drawingml/2006/main"/>
           <a:p xmlns:a="http://schemas.openxmlformats.org/drawingml/2006/main">
             <a:pPr algn="l">
+              <a:buNone/>
               <a:defRPr sz="1200" b="1">
                 <a:solidFill>
                   <a:srgbClr val="555555"/>
@@ -12187,6 +12347,7 @@
           <a:lstStyle xmlns:a="http://schemas.openxmlformats.org/drawingml/2006/main"/>
           <a:p xmlns:a="http://schemas.openxmlformats.org/drawingml/2006/main">
             <a:pPr algn="l">
+              <a:buNone/>
               <a:defRPr sz="1950" b="0">
                 <a:solidFill>
                   <a:srgbClr val="000000"/>
@@ -12237,6 +12398,7 @@
           <a:lstStyle xmlns:a="http://schemas.openxmlformats.org/drawingml/2006/main"/>
           <a:p xmlns:a="http://schemas.openxmlformats.org/drawingml/2006/main">
             <a:pPr algn="l">
+              <a:buNone/>
               <a:defRPr sz="1350" b="0">
                 <a:solidFill>
                   <a:srgbClr val="222222"/>
@@ -12287,6 +12449,7 @@
           <a:lstStyle xmlns:a="http://schemas.openxmlformats.org/drawingml/2006/main"/>
           <a:p xmlns:a="http://schemas.openxmlformats.org/drawingml/2006/main">
             <a:pPr algn="l">
+              <a:buNone/>
               <a:defRPr sz="1125" b="0">
                 <a:solidFill>
                   <a:srgbClr val="555555"/>
@@ -12337,6 +12500,7 @@
           <a:lstStyle xmlns:a="http://schemas.openxmlformats.org/drawingml/2006/main"/>
           <a:p xmlns:a="http://schemas.openxmlformats.org/drawingml/2006/main">
             <a:pPr algn="r">
+              <a:buNone/>
               <a:defRPr sz="1125" b="0">
                 <a:solidFill>
                   <a:srgbClr val="000000"/>
@@ -12416,6 +12580,7 @@
           <a:lstStyle xmlns:a="http://schemas.openxmlformats.org/drawingml/2006/main"/>
           <a:p xmlns:a="http://schemas.openxmlformats.org/drawingml/2006/main">
             <a:pPr algn="l">
+              <a:buNone/>
               <a:defRPr sz="2925" b="0">
                 <a:solidFill>
                   <a:srgbClr val="000000"/>
@@ -12466,6 +12631,7 @@
           <a:lstStyle xmlns:a="http://schemas.openxmlformats.org/drawingml/2006/main"/>
           <a:p xmlns:a="http://schemas.openxmlformats.org/drawingml/2006/main">
             <a:pPr algn="l">
+              <a:buNone/>
               <a:defRPr sz="1650" b="0">
                 <a:solidFill>
                   <a:srgbClr val="555555"/>
@@ -12516,6 +12682,7 @@
           <a:lstStyle xmlns:a="http://schemas.openxmlformats.org/drawingml/2006/main"/>
           <a:p xmlns:a="http://schemas.openxmlformats.org/drawingml/2006/main">
             <a:pPr algn="l">
+              <a:buNone/>
               <a:defRPr sz="1125" b="0">
                 <a:solidFill>
                   <a:srgbClr val="555555"/>
@@ -12566,6 +12733,7 @@
           <a:lstStyle xmlns:a="http://schemas.openxmlformats.org/drawingml/2006/main"/>
           <a:p xmlns:a="http://schemas.openxmlformats.org/drawingml/2006/main">
             <a:pPr algn="r">
+              <a:buNone/>
               <a:defRPr sz="1125" b="0">
                 <a:solidFill>
                   <a:srgbClr val="000000"/>
@@ -12647,6 +12815,7 @@
           <a:lstStyle xmlns:a="http://schemas.openxmlformats.org/drawingml/2006/main"/>
           <a:p xmlns:a="http://schemas.openxmlformats.org/drawingml/2006/main">
             <a:pPr algn="l">
+              <a:buNone/>
               <a:defRPr sz="1200" b="1">
                 <a:solidFill>
                   <a:srgbClr val="FFFFFF"/>
@@ -12697,6 +12866,7 @@
           <a:lstStyle xmlns:a="http://schemas.openxmlformats.org/drawingml/2006/main"/>
           <a:p xmlns:a="http://schemas.openxmlformats.org/drawingml/2006/main">
             <a:pPr algn="l">
+              <a:buNone/>
               <a:defRPr sz="1350" b="0">
                 <a:solidFill>
                   <a:srgbClr val="FFFFFF"/>
@@ -12709,7 +12879,7 @@
                   <a:srgbClr val="FFFFFF"/>
                 </a:solidFill>
               </a:rPr>
-              <a:t>{"method": "tools/list"}</a:t>
+              <a:t>initialize → notifications/initialized</a:t>
             </a:r>
           </a:p>
           <a:p xmlns:a="http://schemas.openxmlformats.org/drawingml/2006/main">
@@ -12719,6 +12889,7 @@
           </a:p>
           <a:p xmlns:a="http://schemas.openxmlformats.org/drawingml/2006/main">
             <a:pPr algn="l">
+              <a:buNone/>
               <a:defRPr sz="1350" b="0">
                 <a:solidFill>
                   <a:srgbClr val="FFFFFF"/>
@@ -12731,11 +12902,12 @@
                   <a:srgbClr val="FFFFFF"/>
                 </a:solidFill>
               </a:rPr>
-              <a:t>{"method": "tools/call",</a:t>
-            </a:r>
-          </a:p>
-          <a:p xmlns:a="http://schemas.openxmlformats.org/drawingml/2006/main">
-            <a:pPr algn="l">
+              <a:t>{"jsonrpc":"2.0","id":2,"method":"tools/list"}</a:t>
+            </a:r>
+          </a:p>
+          <a:p xmlns:a="http://schemas.openxmlformats.org/drawingml/2006/main">
+            <a:pPr algn="l">
+              <a:buNone/>
               <a:defRPr sz="1350" b="0">
                 <a:solidFill>
                   <a:srgbClr val="FFFFFF"/>
@@ -12748,11 +12920,12 @@
                   <a:srgbClr val="FFFFFF"/>
                 </a:solidFill>
               </a:rPr>
-              <a:t> "params": {</a:t>
-            </a:r>
-          </a:p>
-          <a:p xmlns:a="http://schemas.openxmlformats.org/drawingml/2006/main">
-            <a:pPr algn="l">
+              <a:t/>
+            </a:r>
+          </a:p>
+          <a:p xmlns:a="http://schemas.openxmlformats.org/drawingml/2006/main">
+            <a:pPr algn="l">
+              <a:buNone/>
               <a:defRPr sz="1350" b="0">
                 <a:solidFill>
                   <a:srgbClr val="FFFFFF"/>
@@ -12765,11 +12938,12 @@
                   <a:srgbClr val="FFFFFF"/>
                 </a:solidFill>
               </a:rPr>
-              <a:t>   "name": "inventory.lookup",</a:t>
-            </a:r>
-          </a:p>
-          <a:p xmlns:a="http://schemas.openxmlformats.org/drawingml/2006/main">
-            <a:pPr algn="l">
+              <a:t>{"jsonrpc":"2.0","id":3,</a:t>
+            </a:r>
+          </a:p>
+          <a:p xmlns:a="http://schemas.openxmlformats.org/drawingml/2006/main">
+            <a:pPr algn="l">
+              <a:buNone/>
               <a:defRPr sz="1350" b="0">
                 <a:solidFill>
                   <a:srgbClr val="FFFFFF"/>
@@ -12782,11 +12956,12 @@
                   <a:srgbClr val="FFFFFF"/>
                 </a:solidFill>
               </a:rPr>
-              <a:t>   "arguments": {"sku": "sku-200"}</a:t>
-            </a:r>
-          </a:p>
-          <a:p xmlns:a="http://schemas.openxmlformats.org/drawingml/2006/main">
-            <a:pPr algn="l">
+              <a:t> "method":"tools/call",</a:t>
+            </a:r>
+          </a:p>
+          <a:p xmlns:a="http://schemas.openxmlformats.org/drawingml/2006/main">
+            <a:pPr algn="l">
+              <a:buNone/>
               <a:defRPr sz="1350" b="0">
                 <a:solidFill>
                   <a:srgbClr val="FFFFFF"/>
@@ -12799,7 +12974,25 @@
                   <a:srgbClr val="FFFFFF"/>
                 </a:solidFill>
               </a:rPr>
-              <a:t> }}</a:t>
+              <a:t> "params":{"name":"inventory.lookup",</a:t>
+            </a:r>
+          </a:p>
+          <a:p xmlns:a="http://schemas.openxmlformats.org/drawingml/2006/main">
+            <a:pPr algn="l">
+              <a:buNone/>
+              <a:defRPr sz="1350" b="0">
+                <a:solidFill>
+                  <a:srgbClr val="FFFFFF"/>
+                </a:solidFill>
+              </a:defRPr>
+            </a:pPr>
+            <a:r>
+              <a:rPr sz="1350" b="0">
+                <a:solidFill>
+                  <a:srgbClr val="FFFFFF"/>
+                </a:solidFill>
+              </a:rPr>
+              <a:t> "arguments":{"sku":"sku-200"}}}</a:t>
             </a:r>
           </a:p>
         </p:txBody>
@@ -12868,6 +13061,7 @@
           <a:lstStyle xmlns:a="http://schemas.openxmlformats.org/drawingml/2006/main"/>
           <a:p xmlns:a="http://schemas.openxmlformats.org/drawingml/2006/main">
             <a:pPr algn="l">
+              <a:buNone/>
               <a:defRPr sz="2100" b="0">
                 <a:solidFill>
                   <a:srgbClr val="000000"/>
@@ -12949,6 +13143,7 @@
           <a:lstStyle xmlns:a="http://schemas.openxmlformats.org/drawingml/2006/main"/>
           <a:p xmlns:a="http://schemas.openxmlformats.org/drawingml/2006/main">
             <a:pPr algn="l">
+              <a:buNone/>
               <a:defRPr sz="1650" b="0">
                 <a:solidFill>
                   <a:srgbClr val="222222"/>
@@ -13030,6 +13225,7 @@
           <a:lstStyle xmlns:a="http://schemas.openxmlformats.org/drawingml/2006/main"/>
           <a:p xmlns:a="http://schemas.openxmlformats.org/drawingml/2006/main">
             <a:pPr algn="l">
+              <a:buNone/>
               <a:defRPr sz="1650" b="0">
                 <a:solidFill>
                   <a:srgbClr val="222222"/>
@@ -13111,6 +13307,7 @@
           <a:lstStyle xmlns:a="http://schemas.openxmlformats.org/drawingml/2006/main"/>
           <a:p xmlns:a="http://schemas.openxmlformats.org/drawingml/2006/main">
             <a:pPr algn="l">
+              <a:buNone/>
               <a:defRPr sz="1650" b="0">
                 <a:solidFill>
                   <a:srgbClr val="222222"/>
@@ -13194,6 +13391,7 @@
           <a:lstStyle xmlns:a="http://schemas.openxmlformats.org/drawingml/2006/main"/>
           <a:p xmlns:a="http://schemas.openxmlformats.org/drawingml/2006/main">
             <a:pPr algn="l">
+              <a:buNone/>
               <a:defRPr sz="1350" b="0">
                 <a:solidFill>
                   <a:srgbClr val="000000"/>
@@ -13244,6 +13442,7 @@
           <a:lstStyle xmlns:a="http://schemas.openxmlformats.org/drawingml/2006/main"/>
           <a:p xmlns:a="http://schemas.openxmlformats.org/drawingml/2006/main">
             <a:pPr algn="l">
+              <a:buNone/>
               <a:defRPr sz="1125" b="0">
                 <a:solidFill>
                   <a:srgbClr val="555555"/>
@@ -13294,6 +13493,7 @@
           <a:lstStyle xmlns:a="http://schemas.openxmlformats.org/drawingml/2006/main"/>
           <a:p xmlns:a="http://schemas.openxmlformats.org/drawingml/2006/main">
             <a:pPr algn="r">
+              <a:buNone/>
               <a:defRPr sz="1125" b="0">
                 <a:solidFill>
                   <a:srgbClr val="000000"/>
@@ -13373,6 +13573,7 @@
           <a:lstStyle xmlns:a="http://schemas.openxmlformats.org/drawingml/2006/main"/>
           <a:p xmlns:a="http://schemas.openxmlformats.org/drawingml/2006/main">
             <a:pPr algn="l">
+              <a:buNone/>
               <a:defRPr sz="2925" b="0">
                 <a:solidFill>
                   <a:srgbClr val="000000"/>
@@ -13423,6 +13624,7 @@
           <a:lstStyle xmlns:a="http://schemas.openxmlformats.org/drawingml/2006/main"/>
           <a:p xmlns:a="http://schemas.openxmlformats.org/drawingml/2006/main">
             <a:pPr algn="l">
+              <a:buNone/>
               <a:defRPr sz="1650" b="0">
                 <a:solidFill>
                   <a:srgbClr val="555555"/>
@@ -13473,6 +13675,7 @@
           <a:lstStyle xmlns:a="http://schemas.openxmlformats.org/drawingml/2006/main"/>
           <a:p xmlns:a="http://schemas.openxmlformats.org/drawingml/2006/main">
             <a:pPr algn="l">
+              <a:buNone/>
               <a:defRPr sz="1125" b="0">
                 <a:solidFill>
                   <a:srgbClr val="555555"/>
@@ -13523,6 +13726,7 @@
           <a:lstStyle xmlns:a="http://schemas.openxmlformats.org/drawingml/2006/main"/>
           <a:p xmlns:a="http://schemas.openxmlformats.org/drawingml/2006/main">
             <a:pPr algn="r">
+              <a:buNone/>
               <a:defRPr sz="1125" b="0">
                 <a:solidFill>
                   <a:srgbClr val="000000"/>
@@ -13573,6 +13777,7 @@
           <a:lstStyle xmlns:a="http://schemas.openxmlformats.org/drawingml/2006/main"/>
           <a:p xmlns:a="http://schemas.openxmlformats.org/drawingml/2006/main">
             <a:pPr algn="l">
+              <a:buNone/>
               <a:defRPr sz="4200" b="1">
                 <a:solidFill>
                   <a:srgbClr val="FF6B35"/>
@@ -13623,6 +13828,7 @@
           <a:lstStyle xmlns:a="http://schemas.openxmlformats.org/drawingml/2006/main"/>
           <a:p xmlns:a="http://schemas.openxmlformats.org/drawingml/2006/main">
             <a:pPr algn="l">
+              <a:buNone/>
               <a:defRPr sz="2550" b="0">
                 <a:solidFill>
                   <a:srgbClr val="000000"/>
@@ -13704,6 +13910,7 @@
           <a:lstStyle xmlns:a="http://schemas.openxmlformats.org/drawingml/2006/main"/>
           <a:p xmlns:a="http://schemas.openxmlformats.org/drawingml/2006/main">
             <a:pPr algn="l">
+              <a:buNone/>
               <a:defRPr sz="2025" b="0">
                 <a:solidFill>
                   <a:srgbClr val="000000"/>
@@ -13754,6 +13961,7 @@
           <a:lstStyle xmlns:a="http://schemas.openxmlformats.org/drawingml/2006/main"/>
           <a:p xmlns:a="http://schemas.openxmlformats.org/drawingml/2006/main">
             <a:pPr algn="l">
+              <a:buNone/>
               <a:defRPr sz="1500" b="0">
                 <a:solidFill>
                   <a:srgbClr val="222222"/>
@@ -13837,6 +14045,7 @@
           <a:lstStyle xmlns:a="http://schemas.openxmlformats.org/drawingml/2006/main"/>
           <a:p xmlns:a="http://schemas.openxmlformats.org/drawingml/2006/main">
             <a:pPr algn="l">
+              <a:buNone/>
               <a:defRPr sz="2025" b="0">
                 <a:solidFill>
                   <a:srgbClr val="000000"/>
@@ -13887,6 +14096,7 @@
           <a:lstStyle xmlns:a="http://schemas.openxmlformats.org/drawingml/2006/main"/>
           <a:p xmlns:a="http://schemas.openxmlformats.org/drawingml/2006/main">
             <a:pPr algn="l">
+              <a:buNone/>
               <a:defRPr sz="1500" b="0">
                 <a:solidFill>
                   <a:srgbClr val="222222"/>
@@ -13968,6 +14178,7 @@
           <a:lstStyle xmlns:a="http://schemas.openxmlformats.org/drawingml/2006/main"/>
           <a:p xmlns:a="http://schemas.openxmlformats.org/drawingml/2006/main">
             <a:pPr algn="ctr">
+              <a:buNone/>
               <a:defRPr sz="1200" b="0">
                 <a:solidFill>
                   <a:srgbClr val="555555"/>
@@ -14018,6 +14229,7 @@
           <a:lstStyle xmlns:a="http://schemas.openxmlformats.org/drawingml/2006/main"/>
           <a:p xmlns:a="http://schemas.openxmlformats.org/drawingml/2006/main">
             <a:pPr algn="l">
+              <a:buNone/>
               <a:defRPr sz="1875" b="0">
                 <a:solidFill>
                   <a:srgbClr val="000000"/>
@@ -14068,6 +14280,7 @@
           <a:lstStyle xmlns:a="http://schemas.openxmlformats.org/drawingml/2006/main"/>
           <a:p xmlns:a="http://schemas.openxmlformats.org/drawingml/2006/main">
             <a:pPr algn="l">
+              <a:buNone/>
               <a:defRPr sz="1125" b="0">
                 <a:solidFill>
                   <a:srgbClr val="555555"/>
@@ -14118,6 +14331,7 @@
           <a:lstStyle xmlns:a="http://schemas.openxmlformats.org/drawingml/2006/main"/>
           <a:p xmlns:a="http://schemas.openxmlformats.org/drawingml/2006/main">
             <a:pPr algn="r">
+              <a:buNone/>
               <a:defRPr sz="1125" b="0">
                 <a:solidFill>
                   <a:srgbClr val="000000"/>

--- a/ai-agent-terms-conference-talk.pptx
+++ b/ai-agent-terms-conference-talk.pptx
@@ -2,25 +2,25 @@
 <file path=ppt/presentation.xml><?xml version="1.0" encoding="utf-8"?>
 <p:presentation xmlns:p="http://schemas.openxmlformats.org/presentationml/2006/main">
   <p:sldMasterIdLst>
-    <p:sldMasterId xmlns:r="http://schemas.openxmlformats.org/officeDocument/2006/relationships" id="2147483648" r:id="Rfad0bdf6b0664dac"/>
+    <p:sldMasterId xmlns:r="http://schemas.openxmlformats.org/officeDocument/2006/relationships" id="2147483648" r:id="Re2feea2845c6442f"/>
   </p:sldMasterIdLst>
   <p:notesMasterIdLst>
-    <p:notesMasterId xmlns:r="http://schemas.openxmlformats.org/officeDocument/2006/relationships" r:id="R62a02a58406944e2"/>
+    <p:notesMasterId xmlns:r="http://schemas.openxmlformats.org/officeDocument/2006/relationships" r:id="R961cd7ef3ed54000"/>
   </p:notesMasterIdLst>
   <p:sldIdLst>
-    <p:sldId xmlns:r="http://schemas.openxmlformats.org/officeDocument/2006/relationships" id="256" r:id="R6f0b677dafcf42f4"/>
-    <p:sldId xmlns:r="http://schemas.openxmlformats.org/officeDocument/2006/relationships" id="257" r:id="R2e3ac7b2e2c54617"/>
-    <p:sldId xmlns:r="http://schemas.openxmlformats.org/officeDocument/2006/relationships" id="258" r:id="R8f456186ddd44289"/>
-    <p:sldId xmlns:r="http://schemas.openxmlformats.org/officeDocument/2006/relationships" id="259" r:id="R8281fc70aac74dff"/>
-    <p:sldId xmlns:r="http://schemas.openxmlformats.org/officeDocument/2006/relationships" id="260" r:id="R8e22c65fc27c460d"/>
-    <p:sldId xmlns:r="http://schemas.openxmlformats.org/officeDocument/2006/relationships" id="261" r:id="R498d78172b5f46e5"/>
-    <p:sldId xmlns:r="http://schemas.openxmlformats.org/officeDocument/2006/relationships" id="262" r:id="R6abe605a612643c8"/>
-    <p:sldId xmlns:r="http://schemas.openxmlformats.org/officeDocument/2006/relationships" id="263" r:id="R509272fbeb3f4f1c"/>
-    <p:sldId xmlns:r="http://schemas.openxmlformats.org/officeDocument/2006/relationships" id="264" r:id="Ree4d05c4ccb945ff"/>
-    <p:sldId xmlns:r="http://schemas.openxmlformats.org/officeDocument/2006/relationships" id="265" r:id="Rb72d2eb8ec084ac4"/>
-    <p:sldId xmlns:r="http://schemas.openxmlformats.org/officeDocument/2006/relationships" id="266" r:id="R47895bd608e946b5"/>
-    <p:sldId xmlns:r="http://schemas.openxmlformats.org/officeDocument/2006/relationships" id="267" r:id="R9faf88aa660440c5"/>
-    <p:sldId xmlns:r="http://schemas.openxmlformats.org/officeDocument/2006/relationships" id="268" r:id="R4d42609ca77545b1"/>
+    <p:sldId xmlns:r="http://schemas.openxmlformats.org/officeDocument/2006/relationships" id="256" r:id="R45fc8160f9f14d00"/>
+    <p:sldId xmlns:r="http://schemas.openxmlformats.org/officeDocument/2006/relationships" id="257" r:id="R2e998ffe2c7946e5"/>
+    <p:sldId xmlns:r="http://schemas.openxmlformats.org/officeDocument/2006/relationships" id="258" r:id="R5b0106b01e624681"/>
+    <p:sldId xmlns:r="http://schemas.openxmlformats.org/officeDocument/2006/relationships" id="259" r:id="R4ea1d85851ac496b"/>
+    <p:sldId xmlns:r="http://schemas.openxmlformats.org/officeDocument/2006/relationships" id="260" r:id="R1a0da750b67d48ef"/>
+    <p:sldId xmlns:r="http://schemas.openxmlformats.org/officeDocument/2006/relationships" id="261" r:id="R5d98d94a98514557"/>
+    <p:sldId xmlns:r="http://schemas.openxmlformats.org/officeDocument/2006/relationships" id="262" r:id="Rcb679bfb6d3a42c0"/>
+    <p:sldId xmlns:r="http://schemas.openxmlformats.org/officeDocument/2006/relationships" id="263" r:id="Radf623b8b82144a0"/>
+    <p:sldId xmlns:r="http://schemas.openxmlformats.org/officeDocument/2006/relationships" id="264" r:id="R203552b00f014626"/>
+    <p:sldId xmlns:r="http://schemas.openxmlformats.org/officeDocument/2006/relationships" id="265" r:id="R517fe2231f2d4fed"/>
+    <p:sldId xmlns:r="http://schemas.openxmlformats.org/officeDocument/2006/relationships" id="266" r:id="R4e7436e70253440c"/>
+    <p:sldId xmlns:r="http://schemas.openxmlformats.org/officeDocument/2006/relationships" id="267" r:id="R9fd2e20227874b08"/>
+    <p:sldId xmlns:r="http://schemas.openxmlformats.org/officeDocument/2006/relationships" id="268" r:id="Rfeb2c43f5349448e"/>
   </p:sldIdLst>
   <p:sldSz cx="12192000" cy="6858000"/>
   <p:notesSz cx="6858000" cy="9144000"/>
@@ -789,7 +789,7 @@
           <a:lstStyle xmlns:a="http://schemas.openxmlformats.org/drawingml/2006/main"/>
           <a:p xmlns:a="http://schemas.openxmlformats.org/drawingml/2006/main">
             <a:r>
-              <a:t>Run the command and emphasize that this is a pattern demo. Real agent systems may isolate memory, tools, prompts, permissions, and model calls more strongly than a Python thread.</a:t>
+              <a:t>Run the command and emphasize that this is a pattern demo. Real agent systems may isolate memory, tools, prompts, permissions, and model calls more strongly than an asynchronous .NET task.</a:t>
             </a:r>
           </a:p>
           <a:p xmlns:a="http://schemas.openxmlformats.org/drawingml/2006/main">
@@ -1582,7 +1582,7 @@
   </p:cSld>
   <p:clrMap bg1="lt1" tx1="dk1" bg2="lt2" tx2="dk2" accent1="accent1" accent2="accent2" accent3="accent3" accent4="accent4" accent5="accent5" accent6="accent6" hlink="hlink" folHlink="folHlink"/>
   <p:sldLayoutIdLst>
-    <p:sldLayoutId xmlns:r="http://schemas.openxmlformats.org/officeDocument/2006/relationships" id="2147483649" r:id="Re6f6e35e6b4c4beb"/>
+    <p:sldLayoutId xmlns:r="http://schemas.openxmlformats.org/officeDocument/2006/relationships" id="2147483649" r:id="Rb260cef161bb4050"/>
   </p:sldLayoutIdLst>
   <p:txStyles>
     <p:titleStyle>
@@ -2130,7 +2130,7 @@
       </p:grpSpPr>
       <p:sp>
         <p:nvSpPr>
-          <p:cNvPr id="1" name="">
+          <p:cNvPr id="15" name="">
             <a:extLst xmlns:a="http://schemas.openxmlformats.org/drawingml/2006/main">
               <a:ext uri="{FF2B5EF4-FFF2-40B4-BE49-F238E27FC236}">
                 <a16:creationId xmlns:a16="http://schemas.microsoft.com/office/drawing/2014/main" id="{FF807E85-10DB-4099-BBA1-7F6AB4CCB9D1}"/>
@@ -2793,7 +2793,7 @@
       </p:grpSpPr>
       <p:sp>
         <p:nvSpPr>
-          <p:cNvPr id="1" name="">
+          <p:cNvPr id="15" name="">
             <a:extLst xmlns:a="http://schemas.openxmlformats.org/drawingml/2006/main">
               <a:ext uri="{FF2B5EF4-FFF2-40B4-BE49-F238E27FC236}">
                 <a16:creationId xmlns:a16="http://schemas.microsoft.com/office/drawing/2014/main" id="{FF61C230-FA73-424A-BEF7-53A1DA539A93}"/>
@@ -3072,7 +3072,7 @@
                   <a:srgbClr val="FFFFFF"/>
                 </a:solidFill>
               </a:rPr>
-              <a:t>04-a2a/a2a_demo.py</a:t>
+              <a:t>04-a2a/Program.cs</a:t>
             </a:r>
           </a:p>
         </p:txBody>
@@ -3123,11 +3123,29 @@
                   <a:srgbClr val="FFFFFF"/>
                 </a:solidFill>
               </a:rPr>
-              <a:t>card = GET("/.well-known/agent-card.json")</a:t>
-            </a:r>
-          </a:p>
-          <a:p xmlns:a="http://schemas.openxmlformats.org/drawingml/2006/main">
-            <a:r>
+              <a:t>var card = await client.GetFromJsonAsync&lt;AgentCard&gt;(</a:t>
+            </a:r>
+          </a:p>
+          <a:p xmlns:a="http://schemas.openxmlformats.org/drawingml/2006/main">
+            <a:r>
+              <a:t>    "/.well-known/agent-card.json");</a:t>
+            </a:r>
+          </a:p>
+          <a:p xmlns:a="http://schemas.openxmlformats.org/drawingml/2006/main">
+            <a:pPr algn="l">
+              <a:buNone/>
+              <a:defRPr sz="1350" b="0">
+                <a:solidFill>
+                  <a:srgbClr val="FFFFFF"/>
+                </a:solidFill>
+              </a:defRPr>
+            </a:pPr>
+            <a:r>
+              <a:rPr sz="1350" b="0">
+                <a:solidFill>
+                  <a:srgbClr val="FFFFFF"/>
+                </a:solidFill>
+              </a:rPr>
               <a:t/>
             </a:r>
           </a:p>
@@ -3146,7 +3164,12 @@
                   <a:srgbClr val="FFFFFF"/>
                 </a:solidFill>
               </a:rPr>
-              <a:t># Card tells procurement where to delegate.</a:t>
+              <a:t>// Card tells procurement where to delegate.</a:t>
+            </a:r>
+          </a:p>
+          <a:p xmlns:a="http://schemas.openxmlformats.org/drawingml/2006/main">
+            <a:r>
+              <a:t>var taskUrl = card!.Tasks[0].Url;</a:t>
             </a:r>
           </a:p>
           <a:p xmlns:a="http://schemas.openxmlformats.org/drawingml/2006/main">
@@ -3164,12 +3187,7 @@
                   <a:srgbClr val="FFFFFF"/>
                 </a:solidFill>
               </a:rPr>
-              <a:t>task_url = base_url + card["tasks"][0]["url"]</a:t>
-            </a:r>
-          </a:p>
-          <a:p xmlns:a="http://schemas.openxmlformats.org/drawingml/2006/main">
-            <a:r>
-              <a:t/>
+              <a:t>var result = await client.PostAsJsonAsync(</a:t>
             </a:r>
           </a:p>
           <a:p xmlns:a="http://schemas.openxmlformats.org/drawingml/2006/main">
@@ -3187,7 +3205,7 @@
                   <a:srgbClr val="FFFFFF"/>
                 </a:solidFill>
               </a:rPr>
-              <a:t>result = POST(task_url, {</a:t>
+              <a:t>    taskUrl,</a:t>
             </a:r>
           </a:p>
           <a:p xmlns:a="http://schemas.openxmlformats.org/drawingml/2006/main">
@@ -3205,43 +3223,7 @@
                   <a:srgbClr val="FFFFFF"/>
                 </a:solidFill>
               </a:rPr>
-              <a:t>    "vendor": "Acme Training",</a:t>
-            </a:r>
-          </a:p>
-          <a:p xmlns:a="http://schemas.openxmlformats.org/drawingml/2006/main">
-            <a:pPr algn="l">
-              <a:buNone/>
-              <a:defRPr sz="1350" b="0">
-                <a:solidFill>
-                  <a:srgbClr val="FFFFFF"/>
-                </a:solidFill>
-              </a:defRPr>
-            </a:pPr>
-            <a:r>
-              <a:rPr sz="1350" b="0">
-                <a:solidFill>
-                  <a:srgbClr val="FFFFFF"/>
-                </a:solidFill>
-              </a:rPr>
-              <a:t>    "amount": 4200,</a:t>
-            </a:r>
-          </a:p>
-          <a:p xmlns:a="http://schemas.openxmlformats.org/drawingml/2006/main">
-            <a:pPr algn="l">
-              <a:buNone/>
-              <a:defRPr sz="1350" b="0">
-                <a:solidFill>
-                  <a:srgbClr val="FFFFFF"/>
-                </a:solidFill>
-              </a:defRPr>
-            </a:pPr>
-            <a:r>
-              <a:rPr sz="1350" b="0">
-                <a:solidFill>
-                  <a:srgbClr val="FFFFFF"/>
-                </a:solidFill>
-              </a:rPr>
-              <a:t>})</a:t>
+              <a:t>    new SpendRequest("Acme Training", 4_200));</a:t>
             </a:r>
           </a:p>
         </p:txBody>
@@ -3458,7 +3440,7 @@
                   <a:srgbClr val="000000"/>
                 </a:solidFill>
               </a:rPr>
-              <a:t>python 04-a2a/a2a_demo.py</a:t>
+              <a:t>dotnet run --project 04-a2a</a:t>
             </a:r>
           </a:p>
         </p:txBody>
@@ -3596,7 +3578,7 @@
       </p:grpSpPr>
       <p:sp>
         <p:nvSpPr>
-          <p:cNvPr id="1" name="">
+          <p:cNvPr id="26" name="">
             <a:extLst xmlns:a="http://schemas.openxmlformats.org/drawingml/2006/main">
               <a:ext uri="{FF2B5EF4-FFF2-40B4-BE49-F238E27FC236}">
                 <a16:creationId xmlns:a16="http://schemas.microsoft.com/office/drawing/2014/main" id="{2B46054C-30D5-42CC-A72F-42878A555787}"/>
@@ -4688,7 +4670,7 @@
       </p:grpSpPr>
       <p:sp>
         <p:nvSpPr>
-          <p:cNvPr id="1" name="">
+          <p:cNvPr id="20" name="">
             <a:extLst xmlns:a="http://schemas.openxmlformats.org/drawingml/2006/main">
               <a:ext uri="{FF2B5EF4-FFF2-40B4-BE49-F238E27FC236}">
                 <a16:creationId xmlns:a16="http://schemas.microsoft.com/office/drawing/2014/main" id="{5B76391E-6FD0-43B5-A532-EFC5E6489E2E}"/>
@@ -4783,7 +4765,7 @@
                   <a:srgbClr val="555555"/>
                 </a:solidFill>
               </a:rPr>
-              <a:t>ThreadPoolExecutor stands in for child agents with isolated slices of context.</a:t>
+              <a:t>Task.WhenAny stands in for child agents with isolated slices of context.</a:t>
             </a:r>
           </a:p>
         </p:txBody>
@@ -4967,7 +4949,7 @@
                   <a:srgbClr val="FFFFFF"/>
                 </a:solidFill>
               </a:rPr>
-              <a:t>05-subagents/subagents_demo.py</a:t>
+              <a:t>05-subagents/Program.cs</a:t>
             </a:r>
           </a:p>
         </p:txBody>
@@ -5018,7 +5000,7 @@
                   <a:srgbClr val="FFFFFF"/>
                 </a:solidFill>
               </a:rPr>
-              <a:t>with ThreadPoolExecutor(max_workers=4) as executor:</a:t>
+              <a:t>var pending = checks.Select(RunSubagentAsync).ToList();</a:t>
             </a:r>
           </a:p>
           <a:p xmlns:a="http://schemas.openxmlformats.org/drawingml/2006/main">
@@ -5036,7 +5018,7 @@
                   <a:srgbClr val="FFFFFF"/>
                 </a:solidFill>
               </a:rPr>
-              <a:t>    futures = [</a:t>
+              <a:t/>
             </a:r>
           </a:p>
           <a:p xmlns:a="http://schemas.openxmlformats.org/drawingml/2006/main">
@@ -5054,7 +5036,7 @@
                   <a:srgbClr val="FFFFFF"/>
                 </a:solidFill>
               </a:rPr>
-              <a:t>        executor.submit(run_subagent, check)</a:t>
+              <a:t>while (pending.Count &gt; 0)</a:t>
             </a:r>
           </a:p>
           <a:p xmlns:a="http://schemas.openxmlformats.org/drawingml/2006/main">
@@ -5072,7 +5054,7 @@
                   <a:srgbClr val="FFFFFF"/>
                 </a:solidFill>
               </a:rPr>
-              <a:t>        for check in checks</a:t>
+              <a:t>{</a:t>
             </a:r>
           </a:p>
           <a:p xmlns:a="http://schemas.openxmlformats.org/drawingml/2006/main">
@@ -5090,12 +5072,12 @@
                   <a:srgbClr val="FFFFFF"/>
                 </a:solidFill>
               </a:rPr>
-              <a:t>    ]</a:t>
-            </a:r>
-          </a:p>
-          <a:p xmlns:a="http://schemas.openxmlformats.org/drawingml/2006/main">
-            <a:r>
-              <a:t/>
+              <a:t>    var completed = await Task.WhenAny(pending);</a:t>
+            </a:r>
+          </a:p>
+          <a:p xmlns:a="http://schemas.openxmlformats.org/drawingml/2006/main">
+            <a:r>
+              <a:t>    pending.Remove(completed);</a:t>
             </a:r>
           </a:p>
           <a:p xmlns:a="http://schemas.openxmlformats.org/drawingml/2006/main">
@@ -5113,7 +5095,7 @@
                   <a:srgbClr val="FFFFFF"/>
                 </a:solidFill>
               </a:rPr>
-              <a:t>for future in as_completed(futures):</a:t>
+              <a:t>    Console.WriteLine(await completed);</a:t>
             </a:r>
           </a:p>
           <a:p xmlns:a="http://schemas.openxmlformats.org/drawingml/2006/main">
@@ -5131,7 +5113,7 @@
                   <a:srgbClr val="FFFFFF"/>
                 </a:solidFill>
               </a:rPr>
-              <a:t>    print(future.result())</a:t>
+              <a:t>}</a:t>
             </a:r>
           </a:p>
         </p:txBody>
@@ -5543,7 +5525,7 @@
                   <a:srgbClr val="000000"/>
                 </a:solidFill>
               </a:rPr>
-              <a:t>python 05-subagents/subagents_demo.py</a:t>
+              <a:t>dotnet run --project 05-subagents</a:t>
             </a:r>
           </a:p>
         </p:txBody>
@@ -5681,7 +5663,7 @@
       </p:grpSpPr>
       <p:sp>
         <p:nvSpPr>
-          <p:cNvPr id="1" name="">
+          <p:cNvPr id="36" name="">
             <a:extLst xmlns:a="http://schemas.openxmlformats.org/drawingml/2006/main">
               <a:ext uri="{FF2B5EF4-FFF2-40B4-BE49-F238E27FC236}">
                 <a16:creationId xmlns:a16="http://schemas.microsoft.com/office/drawing/2014/main" id="{3B5620D9-E3E0-49C6-B76C-2B80F3319911}"/>
@@ -7385,7 +7367,7 @@
       </p:grpSpPr>
       <p:sp>
         <p:nvSpPr>
-          <p:cNvPr id="1" name="">
+          <p:cNvPr id="20" name="">
             <a:extLst xmlns:a="http://schemas.openxmlformats.org/drawingml/2006/main">
               <a:ext uri="{FF2B5EF4-FFF2-40B4-BE49-F238E27FC236}">
                 <a16:creationId xmlns:a16="http://schemas.microsoft.com/office/drawing/2014/main" id="{E1CC9779-F84C-48A5-95BC-045E3D6F30A7}"/>
@@ -8289,7 +8271,7 @@
       </p:grpSpPr>
       <p:sp>
         <p:nvSpPr>
-          <p:cNvPr id="1" name="">
+          <p:cNvPr id="15" name="">
             <a:extLst xmlns:a="http://schemas.openxmlformats.org/drawingml/2006/main">
               <a:ext uri="{FF2B5EF4-FFF2-40B4-BE49-F238E27FC236}">
                 <a16:creationId xmlns:a16="http://schemas.microsoft.com/office/drawing/2014/main" id="{73EED95C-50E7-42FB-AC35-E89087D1536A}"/>
@@ -8918,7 +8900,7 @@
                   <a:srgbClr val="000000"/>
                 </a:solidFill>
               </a:rPr>
-              <a:t>python 01-agents-md/demo_agents_md.py 01-agents-md/app/services</a:t>
+              <a:t>dotnet run --project 01-agents-md -- 01-agents-md/app/services</a:t>
             </a:r>
           </a:p>
         </p:txBody>
@@ -8954,7 +8936,7 @@
       </p:grpSpPr>
       <p:sp>
         <p:nvSpPr>
-          <p:cNvPr id="1" name="">
+          <p:cNvPr id="18" name="">
             <a:extLst xmlns:a="http://schemas.openxmlformats.org/drawingml/2006/main">
               <a:ext uri="{FF2B5EF4-FFF2-40B4-BE49-F238E27FC236}">
                 <a16:creationId xmlns:a16="http://schemas.microsoft.com/office/drawing/2014/main" id="{8E26C40F-E7DB-43BE-B20A-DDD0B118F7C3}"/>
@@ -9233,7 +9215,7 @@
                   <a:srgbClr val="FFFFFF"/>
                 </a:solidFill>
               </a:rPr>
-              <a:t>01-agents-md/demo_agents_md.py</a:t>
+              <a:t>01-agents-md/app/services/AgentInstructionFinder.cs</a:t>
             </a:r>
           </a:p>
         </p:txBody>
@@ -9284,7 +9266,7 @@
                   <a:srgbClr val="FFFFFF"/>
                 </a:solidFill>
               </a:rPr>
-              <a:t>def find_agent_instructions(start):</a:t>
+              <a:t>static IReadOnlyList&lt;string&gt; Find(string start)</a:t>
             </a:r>
           </a:p>
           <a:p xmlns:a="http://schemas.openxmlformats.org/drawingml/2006/main">
@@ -9302,7 +9284,7 @@
                   <a:srgbClr val="FFFFFF"/>
                 </a:solidFill>
               </a:rPr>
-              <a:t>    current = Path(start).resolve()</a:t>
+              <a:t>{</a:t>
             </a:r>
           </a:p>
           <a:p xmlns:a="http://schemas.openxmlformats.org/drawingml/2006/main">
@@ -9320,7 +9302,7 @@
                   <a:srgbClr val="FFFFFF"/>
                 </a:solidFill>
               </a:rPr>
-              <a:t>    found = []</a:t>
+              <a:t>    var dir = new DirectoryInfo(start);</a:t>
             </a:r>
           </a:p>
           <a:p xmlns:a="http://schemas.openxmlformats.org/drawingml/2006/main">
@@ -9338,7 +9320,7 @@
                   <a:srgbClr val="FFFFFF"/>
                 </a:solidFill>
               </a:rPr>
-              <a:t>    for folder in [current, *current.parents]:</a:t>
+              <a:t>    var found = new List&lt;string&gt;();</a:t>
             </a:r>
           </a:p>
           <a:p xmlns:a="http://schemas.openxmlformats.org/drawingml/2006/main">
@@ -9356,7 +9338,7 @@
                   <a:srgbClr val="FFFFFF"/>
                 </a:solidFill>
               </a:rPr>
-              <a:t>        candidate = folder / "AGENTS.md"</a:t>
+              <a:t>    while (dir is not null) {</a:t>
             </a:r>
           </a:p>
           <a:p xmlns:a="http://schemas.openxmlformats.org/drawingml/2006/main">
@@ -9374,7 +9356,7 @@
                   <a:srgbClr val="FFFFFF"/>
                 </a:solidFill>
               </a:rPr>
-              <a:t>        if candidate.exists():</a:t>
+              <a:t>        var file = Path.Combine(dir.FullName, "AGENTS.md");</a:t>
             </a:r>
           </a:p>
           <a:p xmlns:a="http://schemas.openxmlformats.org/drawingml/2006/main">
@@ -9392,7 +9374,7 @@
                   <a:srgbClr val="FFFFFF"/>
                 </a:solidFill>
               </a:rPr>
-              <a:t>            found.append(candidate)</a:t>
+              <a:t>        if (File.Exists(file)) found.Add(file);</a:t>
             </a:r>
           </a:p>
           <a:p xmlns:a="http://schemas.openxmlformats.org/drawingml/2006/main">
@@ -9410,7 +9392,79 @@
                   <a:srgbClr val="FFFFFF"/>
                 </a:solidFill>
               </a:rPr>
-              <a:t>    return list(reversed(found))</a:t>
+              <a:t>        dir = dir.Parent;</a:t>
+            </a:r>
+          </a:p>
+          <a:p xmlns:a="http://schemas.openxmlformats.org/drawingml/2006/main">
+            <a:pPr algn="l">
+              <a:buNone/>
+              <a:defRPr sz="1350" b="0">
+                <a:solidFill>
+                  <a:srgbClr val="FFFFFF"/>
+                </a:solidFill>
+              </a:defRPr>
+            </a:pPr>
+            <a:r>
+              <a:rPr sz="1350" b="0">
+                <a:solidFill>
+                  <a:srgbClr val="FFFFFF"/>
+                </a:solidFill>
+              </a:rPr>
+              <a:t>    }</a:t>
+            </a:r>
+          </a:p>
+          <a:p xmlns:a="http://schemas.openxmlformats.org/drawingml/2006/main">
+            <a:pPr algn="l">
+              <a:buNone/>
+              <a:defRPr sz="1350" b="0">
+                <a:solidFill>
+                  <a:srgbClr val="FFFFFF"/>
+                </a:solidFill>
+              </a:defRPr>
+            </a:pPr>
+            <a:r>
+              <a:rPr sz="1350" b="0">
+                <a:solidFill>
+                  <a:srgbClr val="FFFFFF"/>
+                </a:solidFill>
+              </a:rPr>
+              <a:t>    found.Reverse();</a:t>
+            </a:r>
+          </a:p>
+          <a:p xmlns:a="http://schemas.openxmlformats.org/drawingml/2006/main">
+            <a:pPr algn="l">
+              <a:buNone/>
+              <a:defRPr sz="1350" b="0">
+                <a:solidFill>
+                  <a:srgbClr val="FFFFFF"/>
+                </a:solidFill>
+              </a:defRPr>
+            </a:pPr>
+            <a:r>
+              <a:rPr sz="1350" b="0">
+                <a:solidFill>
+                  <a:srgbClr val="FFFFFF"/>
+                </a:solidFill>
+              </a:rPr>
+              <a:t>    return found;</a:t>
+            </a:r>
+          </a:p>
+          <a:p xmlns:a="http://schemas.openxmlformats.org/drawingml/2006/main">
+            <a:pPr algn="l">
+              <a:buNone/>
+              <a:defRPr sz="1350" b="0">
+                <a:solidFill>
+                  <a:srgbClr val="FFFFFF"/>
+                </a:solidFill>
+              </a:defRPr>
+            </a:pPr>
+            <a:r>
+              <a:rPr sz="1350" b="0">
+                <a:solidFill>
+                  <a:srgbClr val="FFFFFF"/>
+                </a:solidFill>
+              </a:rPr>
+              <a:t>}</a:t>
             </a:r>
           </a:p>
         </p:txBody>
@@ -9876,7 +9930,7 @@
       </p:grpSpPr>
       <p:sp>
         <p:nvSpPr>
-          <p:cNvPr id="1" name="">
+          <p:cNvPr id="17" name="">
             <a:extLst xmlns:a="http://schemas.openxmlformats.org/drawingml/2006/main">
               <a:ext uri="{FF2B5EF4-FFF2-40B4-BE49-F238E27FC236}">
                 <a16:creationId xmlns:a16="http://schemas.microsoft.com/office/drawing/2014/main" id="{31B1DDCA-01CF-47C3-83FA-3912BF496550}"/>
@@ -10735,7 +10789,7 @@
       </p:grpSpPr>
       <p:sp>
         <p:nvSpPr>
-          <p:cNvPr id="1" name="">
+          <p:cNvPr id="15" name="">
             <a:extLst xmlns:a="http://schemas.openxmlformats.org/drawingml/2006/main">
               <a:ext uri="{FF2B5EF4-FFF2-40B4-BE49-F238E27FC236}">
                 <a16:creationId xmlns:a16="http://schemas.microsoft.com/office/drawing/2014/main" id="{7E1B0FD4-2B98-4827-B56D-CFFDAA9033FB}"/>
@@ -11014,7 +11068,7 @@
                   <a:srgbClr val="FFFFFF"/>
                 </a:solidFill>
               </a:rPr>
-              <a:t>02-agent-skills/agent.py</a:t>
+              <a:t>02-agent-skills/Program.cs</a:t>
             </a:r>
           </a:p>
         </p:txBody>
@@ -11065,7 +11119,7 @@
                   <a:srgbClr val="FFFFFF"/>
                 </a:solidFill>
               </a:rPr>
-              <a:t>def score(task: str, skill: Skill) -&gt; int:</a:t>
+              <a:t>static int Score(string task, Skill skill)</a:t>
             </a:r>
           </a:p>
           <a:p xmlns:a="http://schemas.openxmlformats.org/drawingml/2006/main">
@@ -11083,7 +11137,7 @@
                   <a:srgbClr val="FFFFFF"/>
                 </a:solidFill>
               </a:rPr>
-              <a:t>    haystack = tokenize(</a:t>
+              <a:t>{</a:t>
             </a:r>
           </a:p>
           <a:p xmlns:a="http://schemas.openxmlformats.org/drawingml/2006/main">
@@ -11101,7 +11155,7 @@
                   <a:srgbClr val="FFFFFF"/>
                 </a:solidFill>
               </a:rPr>
-              <a:t>        f"{skill.name.replace('-', ' ')} {skill.description}"</a:t>
+              <a:t>    var words = Tokenize($"{skill.Name} {skill.Description}");</a:t>
             </a:r>
           </a:p>
           <a:p xmlns:a="http://schemas.openxmlformats.org/drawingml/2006/main">
@@ -11119,7 +11173,7 @@
                   <a:srgbClr val="FFFFFF"/>
                 </a:solidFill>
               </a:rPr>
-              <a:t>    )</a:t>
+              <a:t>    return Tokenize(task).Intersect(words).Count();</a:t>
             </a:r>
           </a:p>
           <a:p xmlns:a="http://schemas.openxmlformats.org/drawingml/2006/main">
@@ -11137,7 +11191,7 @@
                   <a:srgbClr val="FFFFFF"/>
                 </a:solidFill>
               </a:rPr>
-              <a:t>    return len(tokenize(task) &amp; haystack)</a:t>
+              <a:t>}</a:t>
             </a:r>
           </a:p>
         </p:txBody>
@@ -11221,7 +11275,7 @@
                   <a:srgbClr val="000000"/>
                 </a:solidFill>
               </a:rPr>
-              <a:t>python 02-agent-skills/agent.py "make a conference deck outline"</a:t>
+              <a:t>dotnet run --project 02-agent-skills -- "make a conference deck outline"</a:t>
             </a:r>
           </a:p>
         </p:txBody>
@@ -11492,7 +11546,7 @@
       </p:grpSpPr>
       <p:sp>
         <p:nvSpPr>
-          <p:cNvPr id="1" name="">
+          <p:cNvPr id="23" name="">
             <a:extLst xmlns:a="http://schemas.openxmlformats.org/drawingml/2006/main">
               <a:ext uri="{FF2B5EF4-FFF2-40B4-BE49-F238E27FC236}">
                 <a16:creationId xmlns:a16="http://schemas.microsoft.com/office/drawing/2014/main" id="{69C751FB-8B97-49FD-A530-743B90AE337E}"/>
@@ -12549,7 +12603,7 @@
       </p:grpSpPr>
       <p:sp>
         <p:nvSpPr>
-          <p:cNvPr id="1" name="">
+          <p:cNvPr id="20" name="">
             <a:extLst xmlns:a="http://schemas.openxmlformats.org/drawingml/2006/main">
               <a:ext uri="{FF2B5EF4-FFF2-40B4-BE49-F238E27FC236}">
                 <a16:creationId xmlns:a16="http://schemas.microsoft.com/office/drawing/2014/main" id="{49E7C41F-D8B1-4EE9-B453-B6E1F2B32BB1}"/>
@@ -12828,7 +12882,7 @@
                   <a:srgbClr val="FFFFFF"/>
                 </a:solidFill>
               </a:rPr>
-              <a:t>03-mcp/client.py</a:t>
+              <a:t>03-mcp/McpClient/Program.cs</a:t>
             </a:r>
           </a:p>
         </p:txBody>
@@ -13404,7 +13458,7 @@
                   <a:srgbClr val="000000"/>
                 </a:solidFill>
               </a:rPr>
-              <a:t>python 03-mcp/client.py</a:t>
+              <a:t>dotnet run --project 03-mcp/McpClient</a:t>
             </a:r>
           </a:p>
         </p:txBody>
@@ -13542,7 +13596,7 @@
       </p:grpSpPr>
       <p:sp>
         <p:nvSpPr>
-          <p:cNvPr id="1" name="">
+          <p:cNvPr id="18" name="">
             <a:extLst xmlns:a="http://schemas.openxmlformats.org/drawingml/2006/main">
               <a:ext uri="{FF2B5EF4-FFF2-40B4-BE49-F238E27FC236}">
                 <a16:creationId xmlns:a16="http://schemas.microsoft.com/office/drawing/2014/main" id="{C5D45367-92CA-49B8-AC7B-762146D69853}"/>
